--- a/NEST_Presentation.pptx
+++ b/NEST_Presentation.pptx
@@ -3093,7 +3093,7 @@
     <p:bg>
       <p:bgPr>
         <a:solidFill>
-          <a:srgbClr val="F0F9FF"/>
+          <a:srgbClr val="FFFFFF"/>
         </a:solidFill>
         <a:effectLst/>
       </p:bgPr>
@@ -3107,31 +3107,25 @@
       <p:grpSpPr/>
       <p:sp>
         <p:nvSpPr>
-          <p:cNvPr id="2" name="TextBox 1"/>
-          <p:cNvSpPr txBox="1"/>
-          <p:nvPr/>
-        </p:nvSpPr>
-        <p:spPr>
-          <a:xfrm>
-            <a:off x="914400" y="1828800"/>
-            <a:ext cx="7315200" cy="1371600"/>
-          </a:xfrm>
-          <a:prstGeom prst="rect">
-            <a:avLst/>
-          </a:prstGeom>
-          <a:noFill/>
-        </p:spPr>
-        <p:txBody>
-          <a:bodyPr wrap="none">
-            <a:spAutoFit/>
-          </a:bodyPr>
-          <a:lstStyle/>
-          <a:p>
-            <a:pPr algn="ctr">
-              <a:defRPr sz="7200" b="1">
-                <a:solidFill>
-                  <a:srgbClr val="1E3A8A"/>
-                </a:solidFill>
+          <p:cNvPr id="2" name="Title 1"/>
+          <p:cNvSpPr>
+            <a:spLocks noGrp="1"/>
+          </p:cNvSpPr>
+          <p:nvPr>
+            <p:ph type="ctrTitle"/>
+          </p:nvPr>
+        </p:nvSpPr>
+        <p:spPr/>
+        <p:txBody>
+          <a:bodyPr/>
+          <a:lstStyle/>
+          <a:p>
+            <a:pPr>
+              <a:defRPr sz="4400" b="1">
+                <a:solidFill>
+                  <a:srgbClr val="2C3E50"/>
+                </a:solidFill>
+                <a:latin typeface="Calibri"/>
               </a:defRPr>
             </a:pPr>
             <a:r>
@@ -3142,105 +3136,34 @@
       </p:sp>
       <p:sp>
         <p:nvSpPr>
-          <p:cNvPr id="3" name="TextBox 2"/>
-          <p:cNvSpPr txBox="1"/>
-          <p:nvPr/>
-        </p:nvSpPr>
-        <p:spPr>
-          <a:xfrm>
-            <a:off x="914400" y="3200400"/>
-            <a:ext cx="7315200" cy="731520"/>
-          </a:xfrm>
-          <a:prstGeom prst="rect">
-            <a:avLst/>
-          </a:prstGeom>
-          <a:noFill/>
-        </p:spPr>
-        <p:txBody>
-          <a:bodyPr wrap="none">
-            <a:spAutoFit/>
-          </a:bodyPr>
-          <a:lstStyle/>
-          <a:p>
-            <a:pPr algn="ctr">
-              <a:defRPr sz="3600">
-                <a:solidFill>
-                  <a:srgbClr val="64748B"/>
-                </a:solidFill>
+          <p:cNvPr id="3" name="Subtitle 2"/>
+          <p:cNvSpPr>
+            <a:spLocks noGrp="1"/>
+          </p:cNvSpPr>
+          <p:nvPr>
+            <p:ph type="subTitle" idx="1"/>
+          </p:nvPr>
+        </p:nvSpPr>
+        <p:spPr/>
+        <p:txBody>
+          <a:bodyPr/>
+          <a:lstStyle/>
+          <a:p>
+            <a:pPr>
+              <a:defRPr sz="2400">
+                <a:solidFill>
+                  <a:srgbClr val="646464"/>
+                </a:solidFill>
+                <a:latin typeface="Calibri Light"/>
               </a:defRPr>
             </a:pPr>
             <a:r>
               <a:t>Near Easy Shop Tracker</a:t>
             </a:r>
           </a:p>
-        </p:txBody>
-      </p:sp>
-      <p:sp>
-        <p:nvSpPr>
-          <p:cNvPr id="4" name="TextBox 3"/>
-          <p:cNvSpPr txBox="1"/>
-          <p:nvPr/>
-        </p:nvSpPr>
-        <p:spPr>
-          <a:xfrm>
-            <a:off x="914400" y="4114800"/>
-            <a:ext cx="7315200" cy="548640"/>
-          </a:xfrm>
-          <a:prstGeom prst="rect">
-            <a:avLst/>
-          </a:prstGeom>
-          <a:noFill/>
-        </p:spPr>
-        <p:txBody>
-          <a:bodyPr wrap="none">
-            <a:spAutoFit/>
-          </a:bodyPr>
-          <a:lstStyle/>
-          <a:p>
-            <a:pPr algn="ctr">
-              <a:defRPr sz="2400">
-                <a:solidFill>
-                  <a:srgbClr val="64748B"/>
-                </a:solidFill>
-              </a:defRPr>
-            </a:pPr>
-            <a:r>
-              <a:t>E-Commerce Grocery Discovery Platform</a:t>
-            </a:r>
-          </a:p>
-        </p:txBody>
-      </p:sp>
-      <p:sp>
-        <p:nvSpPr>
-          <p:cNvPr id="5" name="TextBox 4"/>
-          <p:cNvSpPr txBox="1"/>
-          <p:nvPr/>
-        </p:nvSpPr>
-        <p:spPr>
-          <a:xfrm>
-            <a:off x="914400" y="5943600"/>
-            <a:ext cx="7315200" cy="457200"/>
-          </a:xfrm>
-          <a:prstGeom prst="rect">
-            <a:avLst/>
-          </a:prstGeom>
-          <a:noFill/>
-        </p:spPr>
-        <p:txBody>
-          <a:bodyPr wrap="none">
-            <a:spAutoFit/>
-          </a:bodyPr>
-          <a:lstStyle/>
-          <a:p>
-            <a:pPr algn="ctr">
-              <a:defRPr sz="1800">
-                <a:solidFill>
-                  <a:srgbClr val="64748B"/>
-                </a:solidFill>
-              </a:defRPr>
-            </a:pPr>
-            <a:r>
-              <a:t>College Project Presentation</a:t>
+          <a:p>
+            <a:r>
+              <a:t>Project Report Presentation</a:t>
             </a:r>
           </a:p>
         </p:txBody>
@@ -3273,225 +3196,134 @@
       <p:grpSpPr/>
       <p:sp>
         <p:nvSpPr>
-          <p:cNvPr id="2" name="TextBox 1"/>
-          <p:cNvSpPr txBox="1"/>
+          <p:cNvPr id="2" name="Title 1"/>
+          <p:cNvSpPr>
+            <a:spLocks noGrp="1"/>
+          </p:cNvSpPr>
+          <p:nvPr>
+            <p:ph type="title"/>
+          </p:nvPr>
+        </p:nvSpPr>
+        <p:spPr/>
+        <p:txBody>
+          <a:bodyPr/>
+          <a:lstStyle/>
+          <a:p>
+            <a:pPr algn="l">
+              <a:defRPr sz="3600">
+                <a:solidFill>
+                  <a:srgbClr val="2C3E50"/>
+                </a:solidFill>
+                <a:latin typeface="Calibri"/>
+              </a:defRPr>
+            </a:pPr>
+            <a:r>
+              <a:t>CONCLUSION</a:t>
+            </a:r>
+          </a:p>
+        </p:txBody>
+      </p:sp>
+      <p:sp>
+        <p:nvSpPr>
+          <p:cNvPr id="3" name="Content Placeholder 2"/>
+          <p:cNvSpPr>
+            <a:spLocks noGrp="1"/>
+          </p:cNvSpPr>
+          <p:nvPr>
+            <p:ph idx="1"/>
+          </p:nvPr>
+        </p:nvSpPr>
+        <p:spPr/>
+        <p:txBody>
+          <a:bodyPr/>
+          <a:lstStyle/>
+          <a:p/>
+          <a:p>
+            <a:pPr>
+              <a:spcAft>
+                <a:spcPts val="1400"/>
+              </a:spcAft>
+              <a:defRPr sz="2000">
+                <a:solidFill>
+                  <a:srgbClr val="323232"/>
+                </a:solidFill>
+                <a:latin typeface="Calibri"/>
+              </a:defRPr>
+            </a:pPr>
+            <a:r>
+              <a:t>NEST bridges the gap in hyperlocal e-commerce.</a:t>
+            </a:r>
+          </a:p>
+          <a:p>
+            <a:pPr>
+              <a:spcAft>
+                <a:spcPts val="1400"/>
+              </a:spcAft>
+              <a:defRPr sz="2000">
+                <a:solidFill>
+                  <a:srgbClr val="323232"/>
+                </a:solidFill>
+                <a:latin typeface="Calibri"/>
+              </a:defRPr>
+            </a:pPr>
+            <a:r>
+              <a:t>Demonstrates robust backend logic &amp; polished frontend.</a:t>
+            </a:r>
+          </a:p>
+          <a:p>
+            <a:pPr>
+              <a:spcAft>
+                <a:spcPts val="1400"/>
+              </a:spcAft>
+              <a:defRPr sz="2000">
+                <a:solidFill>
+                  <a:srgbClr val="323232"/>
+                </a:solidFill>
+                <a:latin typeface="Calibri"/>
+              </a:defRPr>
+            </a:pPr>
+            <a:r>
+              <a:t>Scalable modular architecture ready for deployment.</a:t>
+            </a:r>
+          </a:p>
+          <a:p>
+            <a:pPr>
+              <a:spcAft>
+                <a:spcPts val="1400"/>
+              </a:spcAft>
+              <a:defRPr sz="2000">
+                <a:solidFill>
+                  <a:srgbClr val="323232"/>
+                </a:solidFill>
+                <a:latin typeface="Calibri"/>
+              </a:defRPr>
+            </a:pPr>
+            <a:r>
+              <a:t>Empowers small businesses with modern technology.</a:t>
+            </a:r>
+          </a:p>
+        </p:txBody>
+      </p:sp>
+      <p:sp>
+        <p:nvSpPr>
+          <p:cNvPr id="4" name="Rectangle 3"/>
+          <p:cNvSpPr/>
           <p:nvPr/>
         </p:nvSpPr>
         <p:spPr>
           <a:xfrm>
-            <a:off x="457200" y="274320"/>
-            <a:ext cx="8229600" cy="731520"/>
-          </a:xfrm>
-          <a:prstGeom prst="rect">
-            <a:avLst/>
-          </a:prstGeom>
-          <a:noFill/>
-        </p:spPr>
-        <p:txBody>
-          <a:bodyPr wrap="none">
-            <a:spAutoFit/>
-          </a:bodyPr>
-          <a:lstStyle/>
-          <a:p>
-            <a:pPr algn="ctr">
-              <a:defRPr sz="3600" b="1">
-                <a:solidFill>
-                  <a:srgbClr val="1E3A8A"/>
-                </a:solidFill>
-              </a:defRPr>
-            </a:pPr>
-            <a:r>
-              <a:t>CONCLUSION</a:t>
-            </a:r>
-          </a:p>
-        </p:txBody>
-      </p:sp>
-      <p:cxnSp>
-        <p:nvCxnSpPr>
-          <p:cNvPr id="3" name="Connector 2"/>
-          <p:cNvCxnSpPr/>
-          <p:nvPr/>
-        </p:nvCxnSpPr>
-        <p:spPr>
-          <a:xfrm>
-            <a:off x="1828800" y="914400"/>
-            <a:ext cx="5486400" cy="0"/>
-          </a:xfrm>
-          <a:prstGeom prst="line">
-            <a:avLst/>
-          </a:prstGeom>
-          <a:ln w="38100">
-            <a:solidFill>
-              <a:srgbClr val="1E3A8A"/>
-            </a:solidFill>
-          </a:ln>
-        </p:spPr>
-        <p:style>
-          <a:lnRef idx="2">
-            <a:schemeClr val="accent1"/>
-          </a:lnRef>
-          <a:fillRef idx="0">
-            <a:schemeClr val="accent1"/>
-          </a:fillRef>
-          <a:effectRef idx="1">
-            <a:schemeClr val="accent1"/>
-          </a:effectRef>
-          <a:fontRef idx="minor">
-            <a:schemeClr val="tx1"/>
-          </a:fontRef>
-        </p:style>
-      </p:cxnSp>
-      <p:sp>
-        <p:nvSpPr>
-          <p:cNvPr id="4" name="TextBox 3"/>
-          <p:cNvSpPr txBox="1"/>
-          <p:nvPr/>
-        </p:nvSpPr>
-        <p:spPr>
-          <a:xfrm>
-            <a:off x="914400" y="1371600"/>
-            <a:ext cx="7315200" cy="548640"/>
-          </a:xfrm>
-          <a:prstGeom prst="rect">
-            <a:avLst/>
-          </a:prstGeom>
-          <a:noFill/>
-        </p:spPr>
-        <p:txBody>
-          <a:bodyPr wrap="none">
-            <a:spAutoFit/>
-          </a:bodyPr>
-          <a:lstStyle/>
-          <a:p>
-            <a:pPr algn="ctr">
-              <a:defRPr sz="3200" b="1">
-                <a:solidFill>
-                  <a:srgbClr val="10B981"/>
-                </a:solidFill>
-              </a:defRPr>
-            </a:pPr>
-            <a:r>
-              <a:t>✅ Successfully Delivered</a:t>
-            </a:r>
-          </a:p>
-        </p:txBody>
-      </p:sp>
-      <p:sp>
-        <p:nvSpPr>
-          <p:cNvPr id="5" name="TextBox 4"/>
-          <p:cNvSpPr txBox="1"/>
-          <p:nvPr/>
-        </p:nvSpPr>
-        <p:spPr>
-          <a:xfrm>
-            <a:off x="1371600" y="2103120"/>
-            <a:ext cx="6400800" cy="2743200"/>
-          </a:xfrm>
-          <a:prstGeom prst="rect">
-            <a:avLst/>
-          </a:prstGeom>
-          <a:noFill/>
-        </p:spPr>
-        <p:txBody>
-          <a:bodyPr wrap="none">
-            <a:spAutoFit/>
-          </a:bodyPr>
-          <a:lstStyle/>
-          <a:p>
-            <a:pPr>
-              <a:spcBef>
-                <a:spcPts val="1200"/>
-              </a:spcBef>
-              <a:defRPr sz="1800">
-                <a:solidFill>
-                  <a:srgbClr val="334155"/>
-                </a:solidFill>
-              </a:defRPr>
-            </a:pPr>
-            <a:r>
-              <a:t>✓ Dual-role platform (Customer &amp; Shop Owner)</a:t>
-            </a:r>
-          </a:p>
-          <a:p>
-            <a:pPr>
-              <a:spcBef>
-                <a:spcPts val="1200"/>
-              </a:spcBef>
-              <a:defRPr sz="1800">
-                <a:solidFill>
-                  <a:srgbClr val="334155"/>
-                </a:solidFill>
-              </a:defRPr>
-            </a:pPr>
-            <a:r>
-              <a:t>✓ 1000+ product catalog integration</a:t>
-            </a:r>
-          </a:p>
-          <a:p>
-            <a:pPr>
-              <a:spcBef>
-                <a:spcPts val="1200"/>
-              </a:spcBef>
-              <a:defRPr sz="1800">
-                <a:solidFill>
-                  <a:srgbClr val="334155"/>
-                </a:solidFill>
-              </a:defRPr>
-            </a:pPr>
-            <a:r>
-              <a:t>✓ GPS-based shop discovery system</a:t>
-            </a:r>
-          </a:p>
-          <a:p>
-            <a:pPr>
-              <a:spcBef>
-                <a:spcPts val="1200"/>
-              </a:spcBef>
-              <a:defRPr sz="1800">
-                <a:solidFill>
-                  <a:srgbClr val="334155"/>
-                </a:solidFill>
-              </a:defRPr>
-            </a:pPr>
-            <a:r>
-              <a:t>✓ Complete inventory &amp; billing management</a:t>
-            </a:r>
-          </a:p>
-          <a:p>
-            <a:pPr>
-              <a:spcBef>
-                <a:spcPts val="1200"/>
-              </a:spcBef>
-              <a:defRPr sz="1800">
-                <a:solidFill>
-                  <a:srgbClr val="334155"/>
-                </a:solidFill>
-              </a:defRPr>
-            </a:pPr>
-            <a:r>
-              <a:t>✓ Comprehensive sales analytics with charts</a:t>
-            </a:r>
-          </a:p>
-        </p:txBody>
-      </p:sp>
-      <p:sp>
-        <p:nvSpPr>
-          <p:cNvPr id="6" name="Rectangle 5"/>
-          <p:cNvSpPr/>
-          <p:nvPr/>
-        </p:nvSpPr>
-        <p:spPr>
-          <a:xfrm>
-            <a:off x="1188720" y="5029200"/>
-            <a:ext cx="1645920" cy="914400"/>
+            <a:off x="457200" y="1188720"/>
+            <a:ext cx="8229600" cy="45720"/>
           </a:xfrm>
           <a:prstGeom prst="rect">
             <a:avLst/>
           </a:prstGeom>
           <a:solidFill>
-            <a:srgbClr val="667EEA"/>
+            <a:srgbClr val="16A085"/>
           </a:solidFill>
-          <a:ln/>
+          <a:ln>
+            <a:noFill/>
+          </a:ln>
         </p:spPr>
         <p:style>
           <a:lnRef idx="1">
@@ -3511,249 +3343,7 @@
           <a:bodyPr rtlCol="0" anchor="ctr"/>
           <a:lstStyle/>
           <a:p>
-            <a:pPr algn="ctr">
-              <a:defRPr sz="2400" b="1">
-                <a:solidFill>
-                  <a:srgbClr val="FFFFFF"/>
-                </a:solidFill>
-              </a:defRPr>
-            </a:pPr>
-            <a:r>
-              <a:t>15+</a:t>
-            </a:r>
-          </a:p>
-          <a:p>
-            <a:pPr algn="ctr">
-              <a:defRPr sz="1100">
-                <a:solidFill>
-                  <a:srgbClr val="FFFFFF"/>
-                </a:solidFill>
-              </a:defRPr>
-            </a:pPr>
-            <a:r>
-              <a:t>Screens</a:t>
-            </a:r>
-          </a:p>
-        </p:txBody>
-      </p:sp>
-      <p:sp>
-        <p:nvSpPr>
-          <p:cNvPr id="7" name="Rectangle 6"/>
-          <p:cNvSpPr/>
-          <p:nvPr/>
-        </p:nvSpPr>
-        <p:spPr>
-          <a:xfrm>
-            <a:off x="3017520" y="5029200"/>
-            <a:ext cx="1645920" cy="914400"/>
-          </a:xfrm>
-          <a:prstGeom prst="rect">
-            <a:avLst/>
-          </a:prstGeom>
-          <a:solidFill>
-            <a:srgbClr val="667EEA"/>
-          </a:solidFill>
-          <a:ln/>
-        </p:spPr>
-        <p:style>
-          <a:lnRef idx="1">
-            <a:schemeClr val="accent1"/>
-          </a:lnRef>
-          <a:fillRef idx="3">
-            <a:schemeClr val="accent1"/>
-          </a:fillRef>
-          <a:effectRef idx="2">
-            <a:schemeClr val="accent1"/>
-          </a:effectRef>
-          <a:fontRef idx="minor">
-            <a:schemeClr val="lt1"/>
-          </a:fontRef>
-        </p:style>
-        <p:txBody>
-          <a:bodyPr rtlCol="0" anchor="ctr"/>
-          <a:lstStyle/>
-          <a:p>
-            <a:pPr algn="ctr">
-              <a:defRPr sz="2400" b="1">
-                <a:solidFill>
-                  <a:srgbClr val="FFFFFF"/>
-                </a:solidFill>
-              </a:defRPr>
-            </a:pPr>
-            <a:r>
-              <a:t>5000+</a:t>
-            </a:r>
-          </a:p>
-          <a:p>
-            <a:pPr algn="ctr">
-              <a:defRPr sz="1100">
-                <a:solidFill>
-                  <a:srgbClr val="FFFFFF"/>
-                </a:solidFill>
-              </a:defRPr>
-            </a:pPr>
-            <a:r>
-              <a:t>Lines of Code</a:t>
-            </a:r>
-          </a:p>
-        </p:txBody>
-      </p:sp>
-      <p:sp>
-        <p:nvSpPr>
-          <p:cNvPr id="8" name="Rectangle 7"/>
-          <p:cNvSpPr/>
-          <p:nvPr/>
-        </p:nvSpPr>
-        <p:spPr>
-          <a:xfrm>
-            <a:off x="4846320" y="5029200"/>
-            <a:ext cx="1645920" cy="914400"/>
-          </a:xfrm>
-          <a:prstGeom prst="rect">
-            <a:avLst/>
-          </a:prstGeom>
-          <a:solidFill>
-            <a:srgbClr val="667EEA"/>
-          </a:solidFill>
-          <a:ln/>
-        </p:spPr>
-        <p:style>
-          <a:lnRef idx="1">
-            <a:schemeClr val="accent1"/>
-          </a:lnRef>
-          <a:fillRef idx="3">
-            <a:schemeClr val="accent1"/>
-          </a:fillRef>
-          <a:effectRef idx="2">
-            <a:schemeClr val="accent1"/>
-          </a:effectRef>
-          <a:fontRef idx="minor">
-            <a:schemeClr val="lt1"/>
-          </a:fontRef>
-        </p:style>
-        <p:txBody>
-          <a:bodyPr rtlCol="0" anchor="ctr"/>
-          <a:lstStyle/>
-          <a:p>
-            <a:pPr algn="ctr">
-              <a:defRPr sz="2400" b="1">
-                <a:solidFill>
-                  <a:srgbClr val="FFFFFF"/>
-                </a:solidFill>
-              </a:defRPr>
-            </a:pPr>
-            <a:r>
-              <a:t>3</a:t>
-            </a:r>
-          </a:p>
-          <a:p>
-            <a:pPr algn="ctr">
-              <a:defRPr sz="1100">
-                <a:solidFill>
-                  <a:srgbClr val="FFFFFF"/>
-                </a:solidFill>
-              </a:defRPr>
-            </a:pPr>
-            <a:r>
-              <a:t>Platforms</a:t>
-            </a:r>
-          </a:p>
-        </p:txBody>
-      </p:sp>
-      <p:sp>
-        <p:nvSpPr>
-          <p:cNvPr id="9" name="Rectangle 8"/>
-          <p:cNvSpPr/>
-          <p:nvPr/>
-        </p:nvSpPr>
-        <p:spPr>
-          <a:xfrm>
-            <a:off x="6675120" y="5029200"/>
-            <a:ext cx="1645920" cy="914400"/>
-          </a:xfrm>
-          <a:prstGeom prst="rect">
-            <a:avLst/>
-          </a:prstGeom>
-          <a:solidFill>
-            <a:srgbClr val="667EEA"/>
-          </a:solidFill>
-          <a:ln/>
-        </p:spPr>
-        <p:style>
-          <a:lnRef idx="1">
-            <a:schemeClr val="accent1"/>
-          </a:lnRef>
-          <a:fillRef idx="3">
-            <a:schemeClr val="accent1"/>
-          </a:fillRef>
-          <a:effectRef idx="2">
-            <a:schemeClr val="accent1"/>
-          </a:effectRef>
-          <a:fontRef idx="minor">
-            <a:schemeClr val="lt1"/>
-          </a:fontRef>
-        </p:style>
-        <p:txBody>
-          <a:bodyPr rtlCol="0" anchor="ctr"/>
-          <a:lstStyle/>
-          <a:p>
-            <a:pPr algn="ctr">
-              <a:defRPr sz="2400" b="1">
-                <a:solidFill>
-                  <a:srgbClr val="FFFFFF"/>
-                </a:solidFill>
-              </a:defRPr>
-            </a:pPr>
-            <a:r>
-              <a:t>25MB</a:t>
-            </a:r>
-          </a:p>
-          <a:p>
-            <a:pPr algn="ctr">
-              <a:defRPr sz="1100">
-                <a:solidFill>
-                  <a:srgbClr val="FFFFFF"/>
-                </a:solidFill>
-              </a:defRPr>
-            </a:pPr>
-            <a:r>
-              <a:t>APK Size</a:t>
-            </a:r>
-          </a:p>
-        </p:txBody>
-      </p:sp>
-      <p:sp>
-        <p:nvSpPr>
-          <p:cNvPr id="10" name="TextBox 9"/>
-          <p:cNvSpPr txBox="1"/>
-          <p:nvPr/>
-        </p:nvSpPr>
-        <p:spPr>
-          <a:xfrm>
-            <a:off x="914400" y="6126480"/>
-            <a:ext cx="7315200" cy="548640"/>
-          </a:xfrm>
-          <a:prstGeom prst="rect">
-            <a:avLst/>
-          </a:prstGeom>
-          <a:noFill/>
-        </p:spPr>
-        <p:txBody>
-          <a:bodyPr wrap="none">
-            <a:spAutoFit/>
-          </a:bodyPr>
-          <a:lstStyle/>
-          <a:p>
-            <a:pPr algn="ctr">
-              <a:defRPr sz="4000" b="1">
-                <a:solidFill>
-                  <a:srgbClr val="1E3A8A"/>
-                </a:solidFill>
-              </a:defRPr>
-            </a:pPr>
-            <a:r>
-              <a:t>Thank You! 🙏</a:t>
-            </a:r>
+            <a:pPr algn="ctr"/>
           </a:p>
         </p:txBody>
       </p:sp>
@@ -3785,174 +3375,170 @@
       <p:grpSpPr/>
       <p:sp>
         <p:nvSpPr>
-          <p:cNvPr id="2" name="TextBox 1"/>
-          <p:cNvSpPr txBox="1"/>
+          <p:cNvPr id="2" name="Title 1"/>
+          <p:cNvSpPr>
+            <a:spLocks noGrp="1"/>
+          </p:cNvSpPr>
+          <p:nvPr>
+            <p:ph type="title"/>
+          </p:nvPr>
+        </p:nvSpPr>
+        <p:spPr/>
+        <p:txBody>
+          <a:bodyPr/>
+          <a:lstStyle/>
+          <a:p>
+            <a:pPr algn="l">
+              <a:defRPr sz="3600">
+                <a:solidFill>
+                  <a:srgbClr val="2C3E50"/>
+                </a:solidFill>
+                <a:latin typeface="Calibri"/>
+              </a:defRPr>
+            </a:pPr>
+            <a:r>
+              <a:t>ABSTRACT</a:t>
+            </a:r>
+          </a:p>
+        </p:txBody>
+      </p:sp>
+      <p:sp>
+        <p:nvSpPr>
+          <p:cNvPr id="3" name="Content Placeholder 2"/>
+          <p:cNvSpPr>
+            <a:spLocks noGrp="1"/>
+          </p:cNvSpPr>
+          <p:nvPr>
+            <p:ph idx="1"/>
+          </p:nvPr>
+        </p:nvSpPr>
+        <p:spPr/>
+        <p:txBody>
+          <a:bodyPr/>
+          <a:lstStyle/>
+          <a:p/>
+          <a:p>
+            <a:pPr>
+              <a:spcAft>
+                <a:spcPts val="1400"/>
+              </a:spcAft>
+              <a:defRPr sz="2000">
+                <a:solidFill>
+                  <a:srgbClr val="323232"/>
+                </a:solidFill>
+                <a:latin typeface="Calibri"/>
+              </a:defRPr>
+            </a:pPr>
+            <a:r>
+              <a:t>Gap: Disconnect between digital consumers and local grocery stores.</a:t>
+            </a:r>
+          </a:p>
+          <a:p>
+            <a:pPr>
+              <a:spcAft>
+                <a:spcPts val="1400"/>
+              </a:spcAft>
+              <a:defRPr sz="2000">
+                <a:solidFill>
+                  <a:srgbClr val="323232"/>
+                </a:solidFill>
+                <a:latin typeface="Calibri"/>
+              </a:defRPr>
+            </a:pPr>
+            <a:r>
+              <a:t>Solution: NEST (Near Easy Shop Tracker), a unified cross-platform mobile app.</a:t>
+            </a:r>
+          </a:p>
+          <a:p>
+            <a:pPr>
+              <a:spcAft>
+                <a:spcPts val="1400"/>
+              </a:spcAft>
+              <a:defRPr sz="2000">
+                <a:solidFill>
+                  <a:srgbClr val="323232"/>
+                </a:solidFill>
+                <a:latin typeface="Calibri"/>
+              </a:defRPr>
+            </a:pPr>
+            <a:r>
+              <a:t>Dual-Interface: Discovery for customer, Management for shop owners.</a:t>
+            </a:r>
+          </a:p>
+          <a:p>
+            <a:pPr>
+              <a:spcAft>
+                <a:spcPts val="1400"/>
+              </a:spcAft>
+              <a:defRPr sz="2000">
+                <a:solidFill>
+                  <a:srgbClr val="323232"/>
+                </a:solidFill>
+                <a:latin typeface="Calibri"/>
+              </a:defRPr>
+            </a:pPr>
+            <a:r>
+              <a:t>Technology: Geolocation &amp; Digital Inventory Management.</a:t>
+            </a:r>
+          </a:p>
+          <a:p>
+            <a:pPr>
+              <a:spcAft>
+                <a:spcPts val="1400"/>
+              </a:spcAft>
+              <a:defRPr sz="2000">
+                <a:solidFill>
+                  <a:srgbClr val="323232"/>
+                </a:solidFill>
+                <a:latin typeface="Calibri"/>
+              </a:defRPr>
+            </a:pPr>
+            <a:r>
+              <a:t>Goal: Create a sustainable, hyperlocal marketplace.</a:t>
+            </a:r>
+          </a:p>
+        </p:txBody>
+      </p:sp>
+      <p:sp>
+        <p:nvSpPr>
+          <p:cNvPr id="4" name="Rectangle 3"/>
+          <p:cNvSpPr/>
           <p:nvPr/>
         </p:nvSpPr>
         <p:spPr>
           <a:xfrm>
-            <a:off x="457200" y="274320"/>
-            <a:ext cx="8229600" cy="731520"/>
+            <a:off x="457200" y="1188720"/>
+            <a:ext cx="8229600" cy="45720"/>
           </a:xfrm>
           <a:prstGeom prst="rect">
             <a:avLst/>
           </a:prstGeom>
-          <a:noFill/>
-        </p:spPr>
-        <p:txBody>
-          <a:bodyPr wrap="none">
-            <a:spAutoFit/>
-          </a:bodyPr>
-          <a:lstStyle/>
-          <a:p>
-            <a:pPr algn="ctr">
-              <a:defRPr sz="3600" b="1">
-                <a:solidFill>
-                  <a:srgbClr val="1E3A8A"/>
-                </a:solidFill>
-              </a:defRPr>
-            </a:pPr>
-            <a:r>
-              <a:t>ABSTRACT</a:t>
-            </a:r>
-          </a:p>
-        </p:txBody>
-      </p:sp>
-      <p:cxnSp>
-        <p:nvCxnSpPr>
-          <p:cNvPr id="3" name="Connector 2"/>
-          <p:cNvCxnSpPr/>
-          <p:nvPr/>
-        </p:nvCxnSpPr>
-        <p:spPr>
-          <a:xfrm>
-            <a:off x="1828800" y="914400"/>
-            <a:ext cx="5486400" cy="0"/>
-          </a:xfrm>
-          <a:prstGeom prst="line">
-            <a:avLst/>
-          </a:prstGeom>
-          <a:ln w="38100">
-            <a:solidFill>
-              <a:srgbClr val="1E3A8A"/>
-            </a:solidFill>
+          <a:solidFill>
+            <a:srgbClr val="16A085"/>
+          </a:solidFill>
+          <a:ln>
+            <a:noFill/>
           </a:ln>
         </p:spPr>
         <p:style>
-          <a:lnRef idx="2">
+          <a:lnRef idx="1">
             <a:schemeClr val="accent1"/>
           </a:lnRef>
-          <a:fillRef idx="0">
+          <a:fillRef idx="3">
             <a:schemeClr val="accent1"/>
           </a:fillRef>
-          <a:effectRef idx="1">
+          <a:effectRef idx="2">
             <a:schemeClr val="accent1"/>
           </a:effectRef>
           <a:fontRef idx="minor">
-            <a:schemeClr val="tx1"/>
+            <a:schemeClr val="lt1"/>
           </a:fontRef>
         </p:style>
-      </p:cxnSp>
-      <p:sp>
-        <p:nvSpPr>
-          <p:cNvPr id="4" name="TextBox 3"/>
-          <p:cNvSpPr txBox="1"/>
-          <p:nvPr/>
-        </p:nvSpPr>
-        <p:spPr>
-          <a:xfrm>
-            <a:off x="731520" y="1371600"/>
-            <a:ext cx="7680960" cy="5029200"/>
-          </a:xfrm>
-          <a:prstGeom prst="rect">
-            <a:avLst/>
-          </a:prstGeom>
-          <a:noFill/>
-        </p:spPr>
-        <p:txBody>
-          <a:bodyPr wrap="square">
-            <a:spAutoFit/>
-          </a:bodyPr>
-          <a:lstStyle/>
-          <a:p>
-            <a:pPr>
-              <a:spcBef>
-                <a:spcPts val="1200"/>
-              </a:spcBef>
-              <a:defRPr sz="1600">
-                <a:solidFill>
-                  <a:srgbClr val="334155"/>
-                </a:solidFill>
-              </a:defRPr>
-            </a:pPr>
-            <a:r>
-              <a:rPr b="1"/>
-              <a:t>Problem: Traditional grocery shopping faces challenges - difficulty discovering nearby stores, no real-time product availability, inefficient shop management</a:t>
-            </a:r>
-          </a:p>
-          <a:p>
-            <a:pPr>
-              <a:spcBef>
-                <a:spcPts val="1200"/>
-              </a:spcBef>
-              <a:defRPr sz="1600">
-                <a:solidFill>
-                  <a:srgbClr val="334155"/>
-                </a:solidFill>
-              </a:defRPr>
-            </a:pPr>
-            <a:r>
-              <a:rPr b="1"/>
-              <a:t>Solution: NEST is a comprehensive digital platform connecting local grocery stores with customers through mobile technology</a:t>
-            </a:r>
-          </a:p>
-          <a:p>
-            <a:pPr>
-              <a:spcBef>
-                <a:spcPts val="1200"/>
-              </a:spcBef>
-              <a:defRPr sz="1600">
-                <a:solidFill>
-                  <a:srgbClr val="334155"/>
-                </a:solidFill>
-              </a:defRPr>
-            </a:pPr>
-            <a:r>
-              <a:rPr b="1"/>
-              <a:t>Technology: Built with Flutter framework for cross-platform support (Android, iOS, Web)</a:t>
-            </a:r>
-          </a:p>
-          <a:p>
-            <a:pPr>
-              <a:spcBef>
-                <a:spcPts val="1200"/>
-              </a:spcBef>
-              <a:defRPr sz="1600">
-                <a:solidFill>
-                  <a:srgbClr val="334155"/>
-                </a:solidFill>
-              </a:defRPr>
-            </a:pPr>
-            <a:r>
-              <a:rPr b="1"/>
-              <a:t>Features: GPS-based shop discovery, 1000+ product catalog, real-time inventory management, automated billing, and sales analytics</a:t>
-            </a:r>
-          </a:p>
-          <a:p>
-            <a:pPr>
-              <a:spcBef>
-                <a:spcPts val="1200"/>
-              </a:spcBef>
-              <a:defRPr sz="1600">
-                <a:solidFill>
-                  <a:srgbClr val="334155"/>
-                </a:solidFill>
-              </a:defRPr>
-            </a:pPr>
-            <a:r>
-              <a:rPr b="1"/>
-              <a:t>Impact: Bridges digital divide for local grocery stores while providing modern shopping conveniences to customers</a:t>
-            </a:r>
+        <p:txBody>
+          <a:bodyPr rtlCol="0" anchor="ctr"/>
+          <a:lstStyle/>
+          <a:p>
+            <a:pPr algn="ctr"/>
           </a:p>
         </p:txBody>
       </p:sp>
@@ -3984,261 +3570,170 @@
       <p:grpSpPr/>
       <p:sp>
         <p:nvSpPr>
-          <p:cNvPr id="2" name="TextBox 1"/>
-          <p:cNvSpPr txBox="1"/>
+          <p:cNvPr id="2" name="Title 1"/>
+          <p:cNvSpPr>
+            <a:spLocks noGrp="1"/>
+          </p:cNvSpPr>
+          <p:nvPr>
+            <p:ph type="title"/>
+          </p:nvPr>
+        </p:nvSpPr>
+        <p:spPr/>
+        <p:txBody>
+          <a:bodyPr/>
+          <a:lstStyle/>
+          <a:p>
+            <a:pPr algn="l">
+              <a:defRPr sz="3600">
+                <a:solidFill>
+                  <a:srgbClr val="2C3E50"/>
+                </a:solidFill>
+                <a:latin typeface="Calibri"/>
+              </a:defRPr>
+            </a:pPr>
+            <a:r>
+              <a:t>PROJECT OBJECTIVES</a:t>
+            </a:r>
+          </a:p>
+        </p:txBody>
+      </p:sp>
+      <p:sp>
+        <p:nvSpPr>
+          <p:cNvPr id="3" name="Content Placeholder 2"/>
+          <p:cNvSpPr>
+            <a:spLocks noGrp="1"/>
+          </p:cNvSpPr>
+          <p:nvPr>
+            <p:ph idx="1"/>
+          </p:nvPr>
+        </p:nvSpPr>
+        <p:spPr/>
+        <p:txBody>
+          <a:bodyPr/>
+          <a:lstStyle/>
+          <a:p/>
+          <a:p>
+            <a:pPr>
+              <a:spcAft>
+                <a:spcPts val="1400"/>
+              </a:spcAft>
+              <a:defRPr sz="2000">
+                <a:solidFill>
+                  <a:srgbClr val="323232"/>
+                </a:solidFill>
+                <a:latin typeface="Calibri"/>
+              </a:defRPr>
+            </a:pPr>
+            <a:r>
+              <a:t>Dual-Role Architecture: Scalable app for Customer &amp; Shop Owner.</a:t>
+            </a:r>
+          </a:p>
+          <a:p>
+            <a:pPr>
+              <a:spcAft>
+                <a:spcPts val="1400"/>
+              </a:spcAft>
+              <a:defRPr sz="2000">
+                <a:solidFill>
+                  <a:srgbClr val="323232"/>
+                </a:solidFill>
+                <a:latin typeface="Calibri"/>
+              </a:defRPr>
+            </a:pPr>
+            <a:r>
+              <a:t>Hyperlocal Discovery: Google Maps integration for real-time finding.</a:t>
+            </a:r>
+          </a:p>
+          <a:p>
+            <a:pPr>
+              <a:spcAft>
+                <a:spcPts val="1400"/>
+              </a:spcAft>
+              <a:defRPr sz="2000">
+                <a:solidFill>
+                  <a:srgbClr val="323232"/>
+                </a:solidFill>
+                <a:latin typeface="Calibri"/>
+              </a:defRPr>
+            </a:pPr>
+            <a:r>
+              <a:t>Digital Transformation: Automated billing and digital inventory.</a:t>
+            </a:r>
+          </a:p>
+          <a:p>
+            <a:pPr>
+              <a:spcAft>
+                <a:spcPts val="1400"/>
+              </a:spcAft>
+              <a:defRPr sz="2000">
+                <a:solidFill>
+                  <a:srgbClr val="323232"/>
+                </a:solidFill>
+                <a:latin typeface="Calibri"/>
+              </a:defRPr>
+            </a:pPr>
+            <a:r>
+              <a:t>Business Intelligence: Enterprise-level analytics for small shops.</a:t>
+            </a:r>
+          </a:p>
+          <a:p>
+            <a:pPr>
+              <a:spcAft>
+                <a:spcPts val="1400"/>
+              </a:spcAft>
+              <a:defRPr sz="2000">
+                <a:solidFill>
+                  <a:srgbClr val="323232"/>
+                </a:solidFill>
+                <a:latin typeface="Calibri"/>
+              </a:defRPr>
+            </a:pPr>
+            <a:r>
+              <a:t>Offline-First: Resilient design for low-connectivity areas.</a:t>
+            </a:r>
+          </a:p>
+        </p:txBody>
+      </p:sp>
+      <p:sp>
+        <p:nvSpPr>
+          <p:cNvPr id="4" name="Rectangle 3"/>
+          <p:cNvSpPr/>
           <p:nvPr/>
         </p:nvSpPr>
         <p:spPr>
           <a:xfrm>
-            <a:off x="457200" y="274320"/>
-            <a:ext cx="8229600" cy="731520"/>
+            <a:off x="457200" y="1188720"/>
+            <a:ext cx="8229600" cy="45720"/>
           </a:xfrm>
           <a:prstGeom prst="rect">
             <a:avLst/>
           </a:prstGeom>
-          <a:noFill/>
-        </p:spPr>
-        <p:txBody>
-          <a:bodyPr wrap="none">
-            <a:spAutoFit/>
-          </a:bodyPr>
-          <a:lstStyle/>
-          <a:p>
-            <a:pPr algn="ctr">
-              <a:defRPr sz="3600" b="1">
-                <a:solidFill>
-                  <a:srgbClr val="1E3A8A"/>
-                </a:solidFill>
-              </a:defRPr>
-            </a:pPr>
-            <a:r>
-              <a:t>PROJECT OBJECTIVES</a:t>
-            </a:r>
-          </a:p>
-        </p:txBody>
-      </p:sp>
-      <p:cxnSp>
-        <p:nvCxnSpPr>
-          <p:cNvPr id="3" name="Connector 2"/>
-          <p:cNvCxnSpPr/>
-          <p:nvPr/>
-        </p:nvCxnSpPr>
-        <p:spPr>
-          <a:xfrm>
-            <a:off x="1828800" y="914400"/>
-            <a:ext cx="5486400" cy="0"/>
-          </a:xfrm>
-          <a:prstGeom prst="line">
-            <a:avLst/>
-          </a:prstGeom>
-          <a:ln w="38100">
-            <a:solidFill>
-              <a:srgbClr val="1E3A8A"/>
-            </a:solidFill>
+          <a:solidFill>
+            <a:srgbClr val="16A085"/>
+          </a:solidFill>
+          <a:ln>
+            <a:noFill/>
           </a:ln>
         </p:spPr>
         <p:style>
-          <a:lnRef idx="2">
+          <a:lnRef idx="1">
             <a:schemeClr val="accent1"/>
           </a:lnRef>
-          <a:fillRef idx="0">
+          <a:fillRef idx="3">
             <a:schemeClr val="accent1"/>
           </a:fillRef>
-          <a:effectRef idx="1">
+          <a:effectRef idx="2">
             <a:schemeClr val="accent1"/>
           </a:effectRef>
           <a:fontRef idx="minor">
-            <a:schemeClr val="tx1"/>
+            <a:schemeClr val="lt1"/>
           </a:fontRef>
         </p:style>
-      </p:cxnSp>
-      <p:sp>
-        <p:nvSpPr>
-          <p:cNvPr id="4" name="TextBox 3"/>
-          <p:cNvSpPr txBox="1"/>
-          <p:nvPr/>
-        </p:nvSpPr>
-        <p:spPr>
-          <a:xfrm>
-            <a:off x="457200" y="1371600"/>
-            <a:ext cx="4114800" cy="5029200"/>
-          </a:xfrm>
-          <a:prstGeom prst="rect">
-            <a:avLst/>
-          </a:prstGeom>
-          <a:noFill/>
-        </p:spPr>
-        <p:txBody>
-          <a:bodyPr wrap="none">
-            <a:spAutoFit/>
-          </a:bodyPr>
-          <a:lstStyle/>
-          <a:p>
-            <a:pPr>
-              <a:defRPr sz="2400" b="1">
-                <a:solidFill>
-                  <a:srgbClr val="1E3A8A"/>
-                </a:solidFill>
-              </a:defRPr>
-            </a:pPr>
-            <a:r>
-              <a:t>🛍️ Customer Goals</a:t>
-            </a:r>
-          </a:p>
-          <a:p>
-            <a:pPr>
-              <a:spcBef>
-                <a:spcPts val="1000"/>
-              </a:spcBef>
-              <a:defRPr sz="1600">
-                <a:solidFill>
-                  <a:srgbClr val="334155"/>
-                </a:solidFill>
-              </a:defRPr>
-            </a:pPr>
-            <a:r>
-              <a:t>✓ Discover nearby stores using GPS</a:t>
-            </a:r>
-          </a:p>
-          <a:p>
-            <a:pPr>
-              <a:spcBef>
-                <a:spcPts val="1000"/>
-              </a:spcBef>
-              <a:defRPr sz="1600">
-                <a:solidFill>
-                  <a:srgbClr val="334155"/>
-                </a:solidFill>
-              </a:defRPr>
-            </a:pPr>
-            <a:r>
-              <a:t>✓ Browse 1000+ product catalog</a:t>
-            </a:r>
-          </a:p>
-          <a:p>
-            <a:pPr>
-              <a:spcBef>
-                <a:spcPts val="1000"/>
-              </a:spcBef>
-              <a:defRPr sz="1600">
-                <a:solidFill>
-                  <a:srgbClr val="334155"/>
-                </a:solidFill>
-              </a:defRPr>
-            </a:pPr>
-            <a:r>
-              <a:t>✓ Real-time availability tracking</a:t>
-            </a:r>
-          </a:p>
-          <a:p>
-            <a:pPr>
-              <a:spcBef>
-                <a:spcPts val="1000"/>
-              </a:spcBef>
-              <a:defRPr sz="1600">
-                <a:solidFill>
-                  <a:srgbClr val="334155"/>
-                </a:solidFill>
-              </a:defRPr>
-            </a:pPr>
-            <a:r>
-              <a:t>✓ Smart shopping cart system</a:t>
-            </a:r>
-          </a:p>
-        </p:txBody>
-      </p:sp>
-      <p:sp>
-        <p:nvSpPr>
-          <p:cNvPr id="5" name="TextBox 4"/>
-          <p:cNvSpPr txBox="1"/>
-          <p:nvPr/>
-        </p:nvSpPr>
-        <p:spPr>
-          <a:xfrm>
-            <a:off x="5029200" y="1371600"/>
-            <a:ext cx="3657600" cy="5029200"/>
-          </a:xfrm>
-          <a:prstGeom prst="rect">
-            <a:avLst/>
-          </a:prstGeom>
-          <a:noFill/>
-        </p:spPr>
-        <p:txBody>
-          <a:bodyPr wrap="none">
-            <a:spAutoFit/>
-          </a:bodyPr>
-          <a:lstStyle/>
-          <a:p>
-            <a:pPr>
-              <a:defRPr sz="2400" b="1">
-                <a:solidFill>
-                  <a:srgbClr val="1E3A8A"/>
-                </a:solidFill>
-              </a:defRPr>
-            </a:pPr>
-            <a:r>
-              <a:t>🏪 Shop Owner Goals</a:t>
-            </a:r>
-          </a:p>
-          <a:p>
-            <a:pPr>
-              <a:spcBef>
-                <a:spcPts val="1000"/>
-              </a:spcBef>
-              <a:defRPr sz="1600">
-                <a:solidFill>
-                  <a:srgbClr val="334155"/>
-                </a:solidFill>
-              </a:defRPr>
-            </a:pPr>
-            <a:r>
-              <a:t>✓ Digital inventory management</a:t>
-            </a:r>
-          </a:p>
-          <a:p>
-            <a:pPr>
-              <a:spcBef>
-                <a:spcPts val="1000"/>
-              </a:spcBef>
-              <a:defRPr sz="1600">
-                <a:solidFill>
-                  <a:srgbClr val="334155"/>
-                </a:solidFill>
-              </a:defRPr>
-            </a:pPr>
-            <a:r>
-              <a:t>✓ Automated billing system</a:t>
-            </a:r>
-          </a:p>
-          <a:p>
-            <a:pPr>
-              <a:spcBef>
-                <a:spcPts val="1000"/>
-              </a:spcBef>
-              <a:defRPr sz="1600">
-                <a:solidFill>
-                  <a:srgbClr val="334155"/>
-                </a:solidFill>
-              </a:defRPr>
-            </a:pPr>
-            <a:r>
-              <a:t>✓ Sales analytics &amp; insights</a:t>
-            </a:r>
-          </a:p>
-          <a:p>
-            <a:pPr>
-              <a:spcBef>
-                <a:spcPts val="1000"/>
-              </a:spcBef>
-              <a:defRPr sz="1600">
-                <a:solidFill>
-                  <a:srgbClr val="334155"/>
-                </a:solidFill>
-              </a:defRPr>
-            </a:pPr>
-            <a:r>
-              <a:t>✓ Business growth tools</a:t>
-            </a:r>
+        <p:txBody>
+          <a:bodyPr rtlCol="0" anchor="ctr"/>
+          <a:lstStyle/>
+          <a:p>
+            <a:pPr algn="ctr"/>
           </a:p>
         </p:txBody>
       </p:sp>
@@ -4270,31 +3765,25 @@
       <p:grpSpPr/>
       <p:sp>
         <p:nvSpPr>
-          <p:cNvPr id="2" name="TextBox 1"/>
-          <p:cNvSpPr txBox="1"/>
-          <p:nvPr/>
-        </p:nvSpPr>
-        <p:spPr>
-          <a:xfrm>
-            <a:off x="457200" y="274320"/>
-            <a:ext cx="8229600" cy="731520"/>
-          </a:xfrm>
-          <a:prstGeom prst="rect">
-            <a:avLst/>
-          </a:prstGeom>
-          <a:noFill/>
-        </p:spPr>
-        <p:txBody>
-          <a:bodyPr wrap="none">
-            <a:spAutoFit/>
-          </a:bodyPr>
-          <a:lstStyle/>
-          <a:p>
-            <a:pPr algn="ctr">
-              <a:defRPr sz="3600" b="1">
-                <a:solidFill>
-                  <a:srgbClr val="1E3A8A"/>
-                </a:solidFill>
+          <p:cNvPr id="2" name="Title 1"/>
+          <p:cNvSpPr>
+            <a:spLocks noGrp="1"/>
+          </p:cNvSpPr>
+          <p:nvPr>
+            <p:ph type="title"/>
+          </p:nvPr>
+        </p:nvSpPr>
+        <p:spPr/>
+        <p:txBody>
+          <a:bodyPr/>
+          <a:lstStyle/>
+          <a:p>
+            <a:pPr algn="l">
+              <a:defRPr sz="3600">
+                <a:solidFill>
+                  <a:srgbClr val="2C3E50"/>
+                </a:solidFill>
+                <a:latin typeface="Calibri"/>
               </a:defRPr>
             </a:pPr>
             <a:r>
@@ -4303,41 +3792,135 @@
           </a:p>
         </p:txBody>
       </p:sp>
-      <p:cxnSp>
-        <p:nvCxnSpPr>
-          <p:cNvPr id="3" name="Connector 2"/>
-          <p:cNvCxnSpPr/>
-          <p:nvPr/>
-        </p:nvCxnSpPr>
-        <p:spPr>
-          <a:xfrm>
-            <a:off x="1828800" y="914400"/>
-            <a:ext cx="5486400" cy="0"/>
-          </a:xfrm>
-          <a:prstGeom prst="line">
-            <a:avLst/>
-          </a:prstGeom>
-          <a:ln w="38100">
-            <a:solidFill>
-              <a:srgbClr val="1E3A8A"/>
-            </a:solidFill>
-          </a:ln>
-        </p:spPr>
-        <p:style>
-          <a:lnRef idx="2">
-            <a:schemeClr val="accent1"/>
-          </a:lnRef>
-          <a:fillRef idx="0">
-            <a:schemeClr val="accent1"/>
-          </a:fillRef>
-          <a:effectRef idx="1">
-            <a:schemeClr val="accent1"/>
-          </a:effectRef>
-          <a:fontRef idx="minor">
-            <a:schemeClr val="tx1"/>
-          </a:fontRef>
-        </p:style>
-      </p:cxnSp>
+      <p:sp>
+        <p:nvSpPr>
+          <p:cNvPr id="3" name="Content Placeholder 2"/>
+          <p:cNvSpPr>
+            <a:spLocks noGrp="1"/>
+          </p:cNvSpPr>
+          <p:nvPr>
+            <p:ph idx="1"/>
+          </p:nvPr>
+        </p:nvSpPr>
+        <p:spPr/>
+        <p:txBody>
+          <a:bodyPr/>
+          <a:lstStyle/>
+          <a:p/>
+          <a:p>
+            <a:pPr>
+              <a:spcAft>
+                <a:spcPts val="1400"/>
+              </a:spcAft>
+              <a:defRPr sz="2000">
+                <a:solidFill>
+                  <a:srgbClr val="323232"/>
+                </a:solidFill>
+                <a:latin typeface="Calibri"/>
+              </a:defRPr>
+            </a:pPr>
+            <a:r>
+              <a:t>Architecture: Service-Oriented, decoupling data from logic.</a:t>
+            </a:r>
+          </a:p>
+          <a:p>
+            <a:pPr>
+              <a:spcAft>
+                <a:spcPts val="1400"/>
+              </a:spcAft>
+              <a:defRPr sz="2000">
+                <a:solidFill>
+                  <a:srgbClr val="323232"/>
+                </a:solidFill>
+                <a:latin typeface="Calibri"/>
+              </a:defRPr>
+            </a:pPr>
+            <a:r>
+              <a:t>Persistence (Hybrid):</a:t>
+            </a:r>
+          </a:p>
+          <a:p>
+            <a:pPr lvl="1">
+              <a:spcAft>
+                <a:spcPts val="1400"/>
+              </a:spcAft>
+              <a:defRPr sz="1800">
+                <a:solidFill>
+                  <a:srgbClr val="323232"/>
+                </a:solidFill>
+                <a:latin typeface="Calibri"/>
+              </a:defRPr>
+            </a:pPr>
+            <a:r>
+              <a:t>Local Storage (Shared Preferences) for sessions.</a:t>
+            </a:r>
+          </a:p>
+          <a:p>
+            <a:pPr lvl="1">
+              <a:spcAft>
+                <a:spcPts val="1400"/>
+              </a:spcAft>
+              <a:defRPr sz="1800">
+                <a:solidFill>
+                  <a:srgbClr val="323232"/>
+                </a:solidFill>
+                <a:latin typeface="Calibri"/>
+              </a:defRPr>
+            </a:pPr>
+            <a:r>
+              <a:t>In-Memory Store (Provider) for high-speed access.</a:t>
+            </a:r>
+          </a:p>
+          <a:p>
+            <a:pPr>
+              <a:spcAft>
+                <a:spcPts val="1400"/>
+              </a:spcAft>
+              <a:defRPr sz="2000">
+                <a:solidFill>
+                  <a:srgbClr val="323232"/>
+                </a:solidFill>
+                <a:latin typeface="Calibri"/>
+              </a:defRPr>
+            </a:pPr>
+            <a:r>
+              <a:t>Cloud (Firebase):</a:t>
+            </a:r>
+          </a:p>
+          <a:p>
+            <a:pPr lvl="1">
+              <a:spcAft>
+                <a:spcPts val="1400"/>
+              </a:spcAft>
+              <a:defRPr sz="1800">
+                <a:solidFill>
+                  <a:srgbClr val="323232"/>
+                </a:solidFill>
+                <a:latin typeface="Calibri"/>
+              </a:defRPr>
+            </a:pPr>
+            <a:r>
+              <a:t>Firestore (NoSQL) for hierarchical data.</a:t>
+            </a:r>
+          </a:p>
+          <a:p>
+            <a:pPr lvl="1">
+              <a:spcAft>
+                <a:spcPts val="1400"/>
+              </a:spcAft>
+              <a:defRPr sz="1800">
+                <a:solidFill>
+                  <a:srgbClr val="323232"/>
+                </a:solidFill>
+                <a:latin typeface="Calibri"/>
+              </a:defRPr>
+            </a:pPr>
+            <a:r>
+              <a:t>Secure Authentication management.</a:t>
+            </a:r>
+          </a:p>
+        </p:txBody>
+      </p:sp>
       <p:sp>
         <p:nvSpPr>
           <p:cNvPr id="4" name="Rectangle 3"/>
@@ -4346,19 +3929,17 @@
         </p:nvSpPr>
         <p:spPr>
           <a:xfrm>
-            <a:off x="914400" y="1645920"/>
-            <a:ext cx="7315200" cy="822960"/>
+            <a:off x="457200" y="1188720"/>
+            <a:ext cx="8229600" cy="45720"/>
           </a:xfrm>
           <a:prstGeom prst="rect">
             <a:avLst/>
           </a:prstGeom>
           <a:solidFill>
-            <a:srgbClr val="F0F9FF"/>
+            <a:srgbClr val="16A085"/>
           </a:solidFill>
           <a:ln>
-            <a:solidFill>
-              <a:srgbClr val="3B82F6"/>
-            </a:solidFill>
+            <a:noFill/>
           </a:ln>
         </p:spPr>
         <p:style>
@@ -4376,229 +3957,10 @@
           </a:fontRef>
         </p:style>
         <p:txBody>
-          <a:bodyPr rtlCol="0" anchor="ctr" wrap="square"/>
-          <a:lstStyle/>
-          <a:p>
-            <a:pPr algn="ctr">
-              <a:defRPr sz="2000" b="1">
-                <a:solidFill>
-                  <a:srgbClr val="1E3A8A"/>
-                </a:solidFill>
-              </a:defRPr>
-            </a:pPr>
-            <a:r>
-              <a:t>🔥 Firebase Core</a:t>
-            </a:r>
-          </a:p>
-          <a:p>
-            <a:pPr>
-              <a:defRPr sz="1400">
-                <a:solidFill>
-                  <a:srgbClr val="64748B"/>
-                </a:solidFill>
-              </a:defRPr>
-            </a:pPr>
-            <a:r>
-              <a:t>Version 2.24.2 - Cloud platform initialization and configuration</a:t>
-            </a:r>
-          </a:p>
-        </p:txBody>
-      </p:sp>
-      <p:sp>
-        <p:nvSpPr>
-          <p:cNvPr id="5" name="Rectangle 4"/>
-          <p:cNvSpPr/>
-          <p:nvPr/>
-        </p:nvSpPr>
-        <p:spPr>
-          <a:xfrm>
-            <a:off x="914400" y="2651760"/>
-            <a:ext cx="7315200" cy="822960"/>
-          </a:xfrm>
-          <a:prstGeom prst="rect">
-            <a:avLst/>
-          </a:prstGeom>
-          <a:solidFill>
-            <a:srgbClr val="F0F9FF"/>
-          </a:solidFill>
-          <a:ln>
-            <a:solidFill>
-              <a:srgbClr val="3B82F6"/>
-            </a:solidFill>
-          </a:ln>
-        </p:spPr>
-        <p:style>
-          <a:lnRef idx="1">
-            <a:schemeClr val="accent1"/>
-          </a:lnRef>
-          <a:fillRef idx="3">
-            <a:schemeClr val="accent1"/>
-          </a:fillRef>
-          <a:effectRef idx="2">
-            <a:schemeClr val="accent1"/>
-          </a:effectRef>
-          <a:fontRef idx="minor">
-            <a:schemeClr val="lt1"/>
-          </a:fontRef>
-        </p:style>
-        <p:txBody>
-          <a:bodyPr rtlCol="0" anchor="ctr" wrap="square"/>
-          <a:lstStyle/>
-          <a:p>
-            <a:pPr algn="ctr">
-              <a:defRPr sz="2000" b="1">
-                <a:solidFill>
-                  <a:srgbClr val="1E3A8A"/>
-                </a:solidFill>
-              </a:defRPr>
-            </a:pPr>
-            <a:r>
-              <a:t>☁️ Cloud Firestore</a:t>
-            </a:r>
-          </a:p>
-          <a:p>
-            <a:pPr>
-              <a:defRPr sz="1400">
-                <a:solidFill>
-                  <a:srgbClr val="64748B"/>
-                </a:solidFill>
-              </a:defRPr>
-            </a:pPr>
-            <a:r>
-              <a:t>NoSQL database with real-time synchronization capabilities</a:t>
-            </a:r>
-          </a:p>
-        </p:txBody>
-      </p:sp>
-      <p:sp>
-        <p:nvSpPr>
-          <p:cNvPr id="6" name="Rectangle 5"/>
-          <p:cNvSpPr/>
-          <p:nvPr/>
-        </p:nvSpPr>
-        <p:spPr>
-          <a:xfrm>
-            <a:off x="914400" y="3657600"/>
-            <a:ext cx="7315200" cy="822960"/>
-          </a:xfrm>
-          <a:prstGeom prst="rect">
-            <a:avLst/>
-          </a:prstGeom>
-          <a:solidFill>
-            <a:srgbClr val="F0F9FF"/>
-          </a:solidFill>
-          <a:ln>
-            <a:solidFill>
-              <a:srgbClr val="3B82F6"/>
-            </a:solidFill>
-          </a:ln>
-        </p:spPr>
-        <p:style>
-          <a:lnRef idx="1">
-            <a:schemeClr val="accent1"/>
-          </a:lnRef>
-          <a:fillRef idx="3">
-            <a:schemeClr val="accent1"/>
-          </a:fillRef>
-          <a:effectRef idx="2">
-            <a:schemeClr val="accent1"/>
-          </a:effectRef>
-          <a:fontRef idx="minor">
-            <a:schemeClr val="lt1"/>
-          </a:fontRef>
-        </p:style>
-        <p:txBody>
-          <a:bodyPr rtlCol="0" anchor="ctr" wrap="square"/>
-          <a:lstStyle/>
-          <a:p>
-            <a:pPr algn="ctr">
-              <a:defRPr sz="2000" b="1">
-                <a:solidFill>
-                  <a:srgbClr val="1E3A8A"/>
-                </a:solidFill>
-              </a:defRPr>
-            </a:pPr>
-            <a:r>
-              <a:t>📦 Provider Pattern</a:t>
-            </a:r>
-          </a:p>
-          <a:p>
-            <a:pPr>
-              <a:defRPr sz="1400">
-                <a:solidFill>
-                  <a:srgbClr val="64748B"/>
-                </a:solidFill>
-              </a:defRPr>
-            </a:pPr>
-            <a:r>
-              <a:t>State management with reactive updates and dependency injection</a:t>
-            </a:r>
-          </a:p>
-        </p:txBody>
-      </p:sp>
-      <p:sp>
-        <p:nvSpPr>
-          <p:cNvPr id="7" name="Rectangle 6"/>
-          <p:cNvSpPr/>
-          <p:nvPr/>
-        </p:nvSpPr>
-        <p:spPr>
-          <a:xfrm>
-            <a:off x="914400" y="4663440"/>
-            <a:ext cx="7315200" cy="822960"/>
-          </a:xfrm>
-          <a:prstGeom prst="rect">
-            <a:avLst/>
-          </a:prstGeom>
-          <a:solidFill>
-            <a:srgbClr val="F0F9FF"/>
-          </a:solidFill>
-          <a:ln>
-            <a:solidFill>
-              <a:srgbClr val="3B82F6"/>
-            </a:solidFill>
-          </a:ln>
-        </p:spPr>
-        <p:style>
-          <a:lnRef idx="1">
-            <a:schemeClr val="accent1"/>
-          </a:lnRef>
-          <a:fillRef idx="3">
-            <a:schemeClr val="accent1"/>
-          </a:fillRef>
-          <a:effectRef idx="2">
-            <a:schemeClr val="accent1"/>
-          </a:effectRef>
-          <a:fontRef idx="minor">
-            <a:schemeClr val="lt1"/>
-          </a:fontRef>
-        </p:style>
-        <p:txBody>
-          <a:bodyPr rtlCol="0" anchor="ctr" wrap="square"/>
-          <a:lstStyle/>
-          <a:p>
-            <a:pPr algn="ctr">
-              <a:defRPr sz="2000" b="1">
-                <a:solidFill>
-                  <a:srgbClr val="1E3A8A"/>
-                </a:solidFill>
-              </a:defRPr>
-            </a:pPr>
-            <a:r>
-              <a:t>💾 Local Storage</a:t>
-            </a:r>
-          </a:p>
-          <a:p>
-            <a:pPr>
-              <a:defRPr sz="1400">
-                <a:solidFill>
-                  <a:srgbClr val="64748B"/>
-                </a:solidFill>
-              </a:defRPr>
-            </a:pPr>
-            <a:r>
-              <a:t>Offline-first architecture with in-memory data caching</a:t>
-            </a:r>
+          <a:bodyPr rtlCol="0" anchor="ctr"/>
+          <a:lstStyle/>
+          <a:p>
+            <a:pPr algn="ctr"/>
           </a:p>
         </p:txBody>
       </p:sp>
@@ -4630,31 +3992,25 @@
       <p:grpSpPr/>
       <p:sp>
         <p:nvSpPr>
-          <p:cNvPr id="2" name="TextBox 1"/>
-          <p:cNvSpPr txBox="1"/>
-          <p:nvPr/>
-        </p:nvSpPr>
-        <p:spPr>
-          <a:xfrm>
-            <a:off x="457200" y="274320"/>
-            <a:ext cx="8229600" cy="731520"/>
-          </a:xfrm>
-          <a:prstGeom prst="rect">
-            <a:avLst/>
-          </a:prstGeom>
-          <a:noFill/>
-        </p:spPr>
-        <p:txBody>
-          <a:bodyPr wrap="none">
-            <a:spAutoFit/>
-          </a:bodyPr>
-          <a:lstStyle/>
-          <a:p>
-            <a:pPr algn="ctr">
-              <a:defRPr sz="3600" b="1">
-                <a:solidFill>
-                  <a:srgbClr val="1E3A8A"/>
-                </a:solidFill>
+          <p:cNvPr id="2" name="Title 1"/>
+          <p:cNvSpPr>
+            <a:spLocks noGrp="1"/>
+          </p:cNvSpPr>
+          <p:nvPr>
+            <p:ph type="title"/>
+          </p:nvPr>
+        </p:nvSpPr>
+        <p:spPr/>
+        <p:txBody>
+          <a:bodyPr/>
+          <a:lstStyle/>
+          <a:p>
+            <a:pPr algn="l">
+              <a:defRPr sz="3600">
+                <a:solidFill>
+                  <a:srgbClr val="2C3E50"/>
+                </a:solidFill>
+                <a:latin typeface="Calibri"/>
               </a:defRPr>
             </a:pPr>
             <a:r>
@@ -4663,41 +4019,135 @@
           </a:p>
         </p:txBody>
       </p:sp>
-      <p:cxnSp>
-        <p:nvCxnSpPr>
-          <p:cNvPr id="3" name="Connector 2"/>
-          <p:cNvCxnSpPr/>
-          <p:nvPr/>
-        </p:nvCxnSpPr>
-        <p:spPr>
-          <a:xfrm>
-            <a:off x="1828800" y="914400"/>
-            <a:ext cx="5486400" cy="0"/>
-          </a:xfrm>
-          <a:prstGeom prst="line">
-            <a:avLst/>
-          </a:prstGeom>
-          <a:ln w="38100">
-            <a:solidFill>
-              <a:srgbClr val="1E3A8A"/>
-            </a:solidFill>
-          </a:ln>
-        </p:spPr>
-        <p:style>
-          <a:lnRef idx="2">
-            <a:schemeClr val="accent1"/>
-          </a:lnRef>
-          <a:fillRef idx="0">
-            <a:schemeClr val="accent1"/>
-          </a:fillRef>
-          <a:effectRef idx="1">
-            <a:schemeClr val="accent1"/>
-          </a:effectRef>
-          <a:fontRef idx="minor">
-            <a:schemeClr val="tx1"/>
-          </a:fontRef>
-        </p:style>
-      </p:cxnSp>
+      <p:sp>
+        <p:nvSpPr>
+          <p:cNvPr id="3" name="Content Placeholder 2"/>
+          <p:cNvSpPr>
+            <a:spLocks noGrp="1"/>
+          </p:cNvSpPr>
+          <p:nvPr>
+            <p:ph idx="1"/>
+          </p:nvPr>
+        </p:nvSpPr>
+        <p:spPr/>
+        <p:txBody>
+          <a:bodyPr/>
+          <a:lstStyle/>
+          <a:p/>
+          <a:p>
+            <a:pPr>
+              <a:spcAft>
+                <a:spcPts val="1400"/>
+              </a:spcAft>
+              <a:defRPr sz="2000">
+                <a:solidFill>
+                  <a:srgbClr val="323232"/>
+                </a:solidFill>
+                <a:latin typeface="Calibri"/>
+              </a:defRPr>
+            </a:pPr>
+            <a:r>
+              <a:t>Framework: Flutter (single codebase for Android/iOS).</a:t>
+            </a:r>
+          </a:p>
+          <a:p>
+            <a:pPr>
+              <a:spcAft>
+                <a:spcPts val="1400"/>
+              </a:spcAft>
+              <a:defRPr sz="2000">
+                <a:solidFill>
+                  <a:srgbClr val="323232"/>
+                </a:solidFill>
+                <a:latin typeface="Calibri"/>
+              </a:defRPr>
+            </a:pPr>
+            <a:r>
+              <a:t>Performance: Compiled native ARM code for 60fps.</a:t>
+            </a:r>
+          </a:p>
+          <a:p>
+            <a:pPr>
+              <a:spcAft>
+                <a:spcPts val="1400"/>
+              </a:spcAft>
+              <a:defRPr sz="2000">
+                <a:solidFill>
+                  <a:srgbClr val="323232"/>
+                </a:solidFill>
+                <a:latin typeface="Calibri"/>
+              </a:defRPr>
+            </a:pPr>
+            <a:r>
+              <a:t>State Management: Provider 6.0 for instant updates.</a:t>
+            </a:r>
+          </a:p>
+          <a:p>
+            <a:pPr>
+              <a:spcAft>
+                <a:spcPts val="1400"/>
+              </a:spcAft>
+              <a:defRPr sz="2000">
+                <a:solidFill>
+                  <a:srgbClr val="323232"/>
+                </a:solidFill>
+                <a:latin typeface="Calibri"/>
+              </a:defRPr>
+            </a:pPr>
+            <a:r>
+              <a:t>UI/UX Design:</a:t>
+            </a:r>
+          </a:p>
+          <a:p>
+            <a:pPr lvl="1">
+              <a:spcAft>
+                <a:spcPts val="1400"/>
+              </a:spcAft>
+              <a:defRPr sz="1800">
+                <a:solidFill>
+                  <a:srgbClr val="323232"/>
+                </a:solidFill>
+                <a:latin typeface="Calibri"/>
+              </a:defRPr>
+            </a:pPr>
+            <a:r>
+              <a:t>Material Design 3 implementation.</a:t>
+            </a:r>
+          </a:p>
+          <a:p>
+            <a:pPr lvl="1">
+              <a:spcAft>
+                <a:spcPts val="1400"/>
+              </a:spcAft>
+              <a:defRPr sz="1800">
+                <a:solidFill>
+                  <a:srgbClr val="323232"/>
+                </a:solidFill>
+                <a:latin typeface="Calibri"/>
+              </a:defRPr>
+            </a:pPr>
+            <a:r>
+              <a:t>Custom modular Widget Library.</a:t>
+            </a:r>
+          </a:p>
+          <a:p>
+            <a:pPr lvl="1">
+              <a:spcAft>
+                <a:spcPts val="1400"/>
+              </a:spcAft>
+              <a:defRPr sz="1800">
+                <a:solidFill>
+                  <a:srgbClr val="323232"/>
+                </a:solidFill>
+                <a:latin typeface="Calibri"/>
+              </a:defRPr>
+            </a:pPr>
+            <a:r>
+              <a:t>Interactive charts via 'fl_chart'.</a:t>
+            </a:r>
+          </a:p>
+        </p:txBody>
+      </p:sp>
       <p:sp>
         <p:nvSpPr>
           <p:cNvPr id="4" name="Rectangle 3"/>
@@ -4706,19 +4156,17 @@
         </p:nvSpPr>
         <p:spPr>
           <a:xfrm>
-            <a:off x="457200" y="1645920"/>
-            <a:ext cx="3931920" cy="1371600"/>
+            <a:off x="457200" y="1188720"/>
+            <a:ext cx="8229600" cy="45720"/>
           </a:xfrm>
           <a:prstGeom prst="rect">
             <a:avLst/>
           </a:prstGeom>
           <a:solidFill>
-            <a:srgbClr val="F0F9FF"/>
+            <a:srgbClr val="16A085"/>
           </a:solidFill>
           <a:ln>
-            <a:solidFill>
-              <a:srgbClr val="3B82F6"/>
-            </a:solidFill>
+            <a:noFill/>
           </a:ln>
         </p:spPr>
         <p:style>
@@ -4736,477 +4184,10 @@
           </a:fontRef>
         </p:style>
         <p:txBody>
-          <a:bodyPr rtlCol="0" anchor="ctr" wrap="square"/>
-          <a:lstStyle/>
-          <a:p>
-            <a:pPr algn="ctr">
-              <a:defRPr sz="1800" b="1">
-                <a:solidFill>
-                  <a:srgbClr val="1E3A8A"/>
-                </a:solidFill>
-              </a:defRPr>
-            </a:pPr>
-            <a:r>
-              <a:t>📱 Flutter 3.0+</a:t>
-            </a:r>
-          </a:p>
-          <a:p>
-            <a:pPr>
-              <a:defRPr sz="1300">
-                <a:solidFill>
-                  <a:srgbClr val="64748B"/>
-                </a:solidFill>
-              </a:defRPr>
-            </a:pPr>
-            <a:r>
-              <a:t>Cross-platform UI framework for beautiful native apps</a:t>
-            </a:r>
-          </a:p>
-        </p:txBody>
-      </p:sp>
-      <p:sp>
-        <p:nvSpPr>
-          <p:cNvPr id="5" name="Rectangle 4"/>
-          <p:cNvSpPr/>
-          <p:nvPr/>
-        </p:nvSpPr>
-        <p:spPr>
-          <a:xfrm>
-            <a:off x="4754880" y="1645920"/>
-            <a:ext cx="3931920" cy="1371600"/>
-          </a:xfrm>
-          <a:prstGeom prst="rect">
-            <a:avLst/>
-          </a:prstGeom>
-          <a:solidFill>
-            <a:srgbClr val="F0F9FF"/>
-          </a:solidFill>
-          <a:ln>
-            <a:solidFill>
-              <a:srgbClr val="3B82F6"/>
-            </a:solidFill>
-          </a:ln>
-        </p:spPr>
-        <p:style>
-          <a:lnRef idx="1">
-            <a:schemeClr val="accent1"/>
-          </a:lnRef>
-          <a:fillRef idx="3">
-            <a:schemeClr val="accent1"/>
-          </a:fillRef>
-          <a:effectRef idx="2">
-            <a:schemeClr val="accent1"/>
-          </a:effectRef>
-          <a:fontRef idx="minor">
-            <a:schemeClr val="lt1"/>
-          </a:fontRef>
-        </p:style>
-        <p:txBody>
-          <a:bodyPr rtlCol="0" anchor="ctr" wrap="square"/>
-          <a:lstStyle/>
-          <a:p>
-            <a:pPr algn="ctr">
-              <a:defRPr sz="1800" b="1">
-                <a:solidFill>
-                  <a:srgbClr val="1E3A8A"/>
-                </a:solidFill>
-              </a:defRPr>
-            </a:pPr>
-            <a:r>
-              <a:t>🎯 Dart 3.0+</a:t>
-            </a:r>
-          </a:p>
-          <a:p>
-            <a:pPr>
-              <a:defRPr sz="1300">
-                <a:solidFill>
-                  <a:srgbClr val="64748B"/>
-                </a:solidFill>
-              </a:defRPr>
-            </a:pPr>
-            <a:r>
-              <a:t>Modern programming language optimized for UI development</a:t>
-            </a:r>
-          </a:p>
-        </p:txBody>
-      </p:sp>
-      <p:sp>
-        <p:nvSpPr>
-          <p:cNvPr id="6" name="Rectangle 5"/>
-          <p:cNvSpPr/>
-          <p:nvPr/>
-        </p:nvSpPr>
-        <p:spPr>
-          <a:xfrm>
-            <a:off x="457200" y="3474720"/>
-            <a:ext cx="3931920" cy="1371600"/>
-          </a:xfrm>
-          <a:prstGeom prst="rect">
-            <a:avLst/>
-          </a:prstGeom>
-          <a:solidFill>
-            <a:srgbClr val="F0F9FF"/>
-          </a:solidFill>
-          <a:ln>
-            <a:solidFill>
-              <a:srgbClr val="3B82F6"/>
-            </a:solidFill>
-          </a:ln>
-        </p:spPr>
-        <p:style>
-          <a:lnRef idx="1">
-            <a:schemeClr val="accent1"/>
-          </a:lnRef>
-          <a:fillRef idx="3">
-            <a:schemeClr val="accent1"/>
-          </a:fillRef>
-          <a:effectRef idx="2">
-            <a:schemeClr val="accent1"/>
-          </a:effectRef>
-          <a:fontRef idx="minor">
-            <a:schemeClr val="lt1"/>
-          </a:fontRef>
-        </p:style>
-        <p:txBody>
-          <a:bodyPr rtlCol="0" anchor="ctr" wrap="square"/>
-          <a:lstStyle/>
-          <a:p>
-            <a:pPr algn="ctr">
-              <a:defRPr sz="1800" b="1">
-                <a:solidFill>
-                  <a:srgbClr val="1E3A8A"/>
-                </a:solidFill>
-              </a:defRPr>
-            </a:pPr>
-            <a:r>
-              <a:t>🎨 Material Design</a:t>
-            </a:r>
-          </a:p>
-          <a:p>
-            <a:pPr>
-              <a:defRPr sz="1300">
-                <a:solidFill>
-                  <a:srgbClr val="64748B"/>
-                </a:solidFill>
-              </a:defRPr>
-            </a:pPr>
-            <a:r>
-              <a:t>Comprehensive UI component library following Google's design system</a:t>
-            </a:r>
-          </a:p>
-        </p:txBody>
-      </p:sp>
-      <p:sp>
-        <p:nvSpPr>
-          <p:cNvPr id="7" name="Rectangle 6"/>
-          <p:cNvSpPr/>
-          <p:nvPr/>
-        </p:nvSpPr>
-        <p:spPr>
-          <a:xfrm>
-            <a:off x="4754880" y="3474720"/>
-            <a:ext cx="3931920" cy="1371600"/>
-          </a:xfrm>
-          <a:prstGeom prst="rect">
-            <a:avLst/>
-          </a:prstGeom>
-          <a:solidFill>
-            <a:srgbClr val="F0F9FF"/>
-          </a:solidFill>
-          <a:ln>
-            <a:solidFill>
-              <a:srgbClr val="3B82F6"/>
-            </a:solidFill>
-          </a:ln>
-        </p:spPr>
-        <p:style>
-          <a:lnRef idx="1">
-            <a:schemeClr val="accent1"/>
-          </a:lnRef>
-          <a:fillRef idx="3">
-            <a:schemeClr val="accent1"/>
-          </a:fillRef>
-          <a:effectRef idx="2">
-            <a:schemeClr val="accent1"/>
-          </a:effectRef>
-          <a:fontRef idx="minor">
-            <a:schemeClr val="lt1"/>
-          </a:fontRef>
-        </p:style>
-        <p:txBody>
-          <a:bodyPr rtlCol="0" anchor="ctr" wrap="square"/>
-          <a:lstStyle/>
-          <a:p>
-            <a:pPr algn="ctr">
-              <a:defRPr sz="1800" b="1">
-                <a:solidFill>
-                  <a:srgbClr val="1E3A8A"/>
-                </a:solidFill>
-              </a:defRPr>
-            </a:pPr>
-            <a:r>
-              <a:t>⚡ Provider 6.0</a:t>
-            </a:r>
-          </a:p>
-          <a:p>
-            <a:pPr>
-              <a:defRPr sz="1300">
-                <a:solidFill>
-                  <a:srgbClr val="64748B"/>
-                </a:solidFill>
-              </a:defRPr>
-            </a:pPr>
-            <a:r>
-              <a:t>Reactive state management for seamless UI updates</a:t>
-            </a:r>
-          </a:p>
-        </p:txBody>
-      </p:sp>
-      <p:sp>
-        <p:nvSpPr>
-          <p:cNvPr id="8" name="Rectangle 7"/>
-          <p:cNvSpPr/>
-          <p:nvPr/>
-        </p:nvSpPr>
-        <p:spPr>
-          <a:xfrm>
-            <a:off x="731520" y="5303520"/>
-            <a:ext cx="1828800" cy="914400"/>
-          </a:xfrm>
-          <a:prstGeom prst="rect">
-            <a:avLst/>
-          </a:prstGeom>
-          <a:solidFill>
-            <a:srgbClr val="10B981"/>
-          </a:solidFill>
-          <a:ln/>
-        </p:spPr>
-        <p:style>
-          <a:lnRef idx="1">
-            <a:schemeClr val="accent1"/>
-          </a:lnRef>
-          <a:fillRef idx="3">
-            <a:schemeClr val="accent1"/>
-          </a:fillRef>
-          <a:effectRef idx="2">
-            <a:schemeClr val="accent1"/>
-          </a:effectRef>
-          <a:fontRef idx="minor">
-            <a:schemeClr val="lt1"/>
-          </a:fontRef>
-        </p:style>
-        <p:txBody>
           <a:bodyPr rtlCol="0" anchor="ctr"/>
           <a:lstStyle/>
           <a:p>
-            <a:pPr algn="ctr">
-              <a:defRPr sz="3200" b="1">
-                <a:solidFill>
-                  <a:srgbClr val="FFFFFF"/>
-                </a:solidFill>
-              </a:defRPr>
-            </a:pPr>
-            <a:r>
-              <a:t>15+</a:t>
-            </a:r>
-          </a:p>
-          <a:p>
-            <a:pPr algn="ctr">
-              <a:defRPr sz="1200">
-                <a:solidFill>
-                  <a:srgbClr val="FFFFFF"/>
-                </a:solidFill>
-              </a:defRPr>
-            </a:pPr>
-            <a:r>
-              <a:t>Screens</a:t>
-            </a:r>
-          </a:p>
-        </p:txBody>
-      </p:sp>
-      <p:sp>
-        <p:nvSpPr>
-          <p:cNvPr id="9" name="Rectangle 8"/>
-          <p:cNvSpPr/>
-          <p:nvPr/>
-        </p:nvSpPr>
-        <p:spPr>
-          <a:xfrm>
-            <a:off x="2743200" y="5303520"/>
-            <a:ext cx="1828800" cy="914400"/>
-          </a:xfrm>
-          <a:prstGeom prst="rect">
-            <a:avLst/>
-          </a:prstGeom>
-          <a:solidFill>
-            <a:srgbClr val="10B981"/>
-          </a:solidFill>
-          <a:ln/>
-        </p:spPr>
-        <p:style>
-          <a:lnRef idx="1">
-            <a:schemeClr val="accent1"/>
-          </a:lnRef>
-          <a:fillRef idx="3">
-            <a:schemeClr val="accent1"/>
-          </a:fillRef>
-          <a:effectRef idx="2">
-            <a:schemeClr val="accent1"/>
-          </a:effectRef>
-          <a:fontRef idx="minor">
-            <a:schemeClr val="lt1"/>
-          </a:fontRef>
-        </p:style>
-        <p:txBody>
-          <a:bodyPr rtlCol="0" anchor="ctr"/>
-          <a:lstStyle/>
-          <a:p>
-            <a:pPr algn="ctr">
-              <a:defRPr sz="3200" b="1">
-                <a:solidFill>
-                  <a:srgbClr val="FFFFFF"/>
-                </a:solidFill>
-              </a:defRPr>
-            </a:pPr>
-            <a:r>
-              <a:t>50+</a:t>
-            </a:r>
-          </a:p>
-          <a:p>
-            <a:pPr algn="ctr">
-              <a:defRPr sz="1200">
-                <a:solidFill>
-                  <a:srgbClr val="FFFFFF"/>
-                </a:solidFill>
-              </a:defRPr>
-            </a:pPr>
-            <a:r>
-              <a:t>Components</a:t>
-            </a:r>
-          </a:p>
-        </p:txBody>
-      </p:sp>
-      <p:sp>
-        <p:nvSpPr>
-          <p:cNvPr id="10" name="Rectangle 9"/>
-          <p:cNvSpPr/>
-          <p:nvPr/>
-        </p:nvSpPr>
-        <p:spPr>
-          <a:xfrm>
-            <a:off x="4754880" y="5303520"/>
-            <a:ext cx="1828800" cy="914400"/>
-          </a:xfrm>
-          <a:prstGeom prst="rect">
-            <a:avLst/>
-          </a:prstGeom>
-          <a:solidFill>
-            <a:srgbClr val="10B981"/>
-          </a:solidFill>
-          <a:ln/>
-        </p:spPr>
-        <p:style>
-          <a:lnRef idx="1">
-            <a:schemeClr val="accent1"/>
-          </a:lnRef>
-          <a:fillRef idx="3">
-            <a:schemeClr val="accent1"/>
-          </a:fillRef>
-          <a:effectRef idx="2">
-            <a:schemeClr val="accent1"/>
-          </a:effectRef>
-          <a:fontRef idx="minor">
-            <a:schemeClr val="lt1"/>
-          </a:fontRef>
-        </p:style>
-        <p:txBody>
-          <a:bodyPr rtlCol="0" anchor="ctr"/>
-          <a:lstStyle/>
-          <a:p>
-            <a:pPr algn="ctr">
-              <a:defRPr sz="3200" b="1">
-                <a:solidFill>
-                  <a:srgbClr val="FFFFFF"/>
-                </a:solidFill>
-              </a:defRPr>
-            </a:pPr>
-            <a:r>
-              <a:t>5000+</a:t>
-            </a:r>
-          </a:p>
-          <a:p>
-            <a:pPr algn="ctr">
-              <a:defRPr sz="1200">
-                <a:solidFill>
-                  <a:srgbClr val="FFFFFF"/>
-                </a:solidFill>
-              </a:defRPr>
-            </a:pPr>
-            <a:r>
-              <a:t>Lines of Code</a:t>
-            </a:r>
-          </a:p>
-        </p:txBody>
-      </p:sp>
-      <p:sp>
-        <p:nvSpPr>
-          <p:cNvPr id="11" name="Rectangle 10"/>
-          <p:cNvSpPr/>
-          <p:nvPr/>
-        </p:nvSpPr>
-        <p:spPr>
-          <a:xfrm>
-            <a:off x="6766560" y="5303520"/>
-            <a:ext cx="1828800" cy="914400"/>
-          </a:xfrm>
-          <a:prstGeom prst="rect">
-            <a:avLst/>
-          </a:prstGeom>
-          <a:solidFill>
-            <a:srgbClr val="10B981"/>
-          </a:solidFill>
-          <a:ln/>
-        </p:spPr>
-        <p:style>
-          <a:lnRef idx="1">
-            <a:schemeClr val="accent1"/>
-          </a:lnRef>
-          <a:fillRef idx="3">
-            <a:schemeClr val="accent1"/>
-          </a:fillRef>
-          <a:effectRef idx="2">
-            <a:schemeClr val="accent1"/>
-          </a:effectRef>
-          <a:fontRef idx="minor">
-            <a:schemeClr val="lt1"/>
-          </a:fontRef>
-        </p:style>
-        <p:txBody>
-          <a:bodyPr rtlCol="0" anchor="ctr"/>
-          <a:lstStyle/>
-          <a:p>
-            <a:pPr algn="ctr">
-              <a:defRPr sz="3200" b="1">
-                <a:solidFill>
-                  <a:srgbClr val="FFFFFF"/>
-                </a:solidFill>
-              </a:defRPr>
-            </a:pPr>
-            <a:r>
-              <a:t>3</a:t>
-            </a:r>
-          </a:p>
-          <a:p>
-            <a:pPr algn="ctr">
-              <a:defRPr sz="1200">
-                <a:solidFill>
-                  <a:srgbClr val="FFFFFF"/>
-                </a:solidFill>
-              </a:defRPr>
-            </a:pPr>
-            <a:r>
-              <a:t>Platforms</a:t>
-            </a:r>
+            <a:pPr algn="ctr"/>
           </a:p>
         </p:txBody>
       </p:sp>
@@ -5238,130 +4219,165 @@
       <p:grpSpPr/>
       <p:sp>
         <p:nvSpPr>
-          <p:cNvPr id="2" name="TextBox 1"/>
-          <p:cNvSpPr txBox="1"/>
+          <p:cNvPr id="2" name="Title 1"/>
+          <p:cNvSpPr>
+            <a:spLocks noGrp="1"/>
+          </p:cNvSpPr>
+          <p:nvPr>
+            <p:ph type="title"/>
+          </p:nvPr>
+        </p:nvSpPr>
+        <p:spPr/>
+        <p:txBody>
+          <a:bodyPr/>
+          <a:lstStyle/>
+          <a:p>
+            <a:pPr algn="l">
+              <a:defRPr sz="3600">
+                <a:solidFill>
+                  <a:srgbClr val="2C3E50"/>
+                </a:solidFill>
+                <a:latin typeface="Calibri"/>
+              </a:defRPr>
+            </a:pPr>
+            <a:r>
+              <a:t>DEVELOPMENT METHODOLOGY</a:t>
+            </a:r>
+          </a:p>
+        </p:txBody>
+      </p:sp>
+      <p:sp>
+        <p:nvSpPr>
+          <p:cNvPr id="3" name="Content Placeholder 2"/>
+          <p:cNvSpPr>
+            <a:spLocks noGrp="1"/>
+          </p:cNvSpPr>
+          <p:nvPr>
+            <p:ph idx="1"/>
+          </p:nvPr>
+        </p:nvSpPr>
+        <p:spPr/>
+        <p:txBody>
+          <a:bodyPr/>
+          <a:lstStyle/>
+          <a:p/>
+          <a:p>
+            <a:pPr>
+              <a:spcAft>
+                <a:spcPts val="1400"/>
+              </a:spcAft>
+              <a:defRPr sz="2000">
+                <a:solidFill>
+                  <a:srgbClr val="323232"/>
+                </a:solidFill>
+                <a:latin typeface="Calibri"/>
+              </a:defRPr>
+            </a:pPr>
+            <a:r>
+              <a:t>Approach: Agile / Feature-Driven Development (FDD).</a:t>
+            </a:r>
+          </a:p>
+          <a:p>
+            <a:pPr>
+              <a:spcAft>
+                <a:spcPts val="1400"/>
+              </a:spcAft>
+              <a:defRPr sz="2000">
+                <a:solidFill>
+                  <a:srgbClr val="323232"/>
+                </a:solidFill>
+                <a:latin typeface="Calibri"/>
+              </a:defRPr>
+            </a:pPr>
+            <a:r>
+              <a:t>Phase 1: Foundation, Themes, Global State.</a:t>
+            </a:r>
+          </a:p>
+          <a:p>
+            <a:pPr>
+              <a:spcAft>
+                <a:spcPts val="1400"/>
+              </a:spcAft>
+              <a:defRPr sz="2000">
+                <a:solidFill>
+                  <a:srgbClr val="323232"/>
+                </a:solidFill>
+                <a:latin typeface="Calibri"/>
+              </a:defRPr>
+            </a:pPr>
+            <a:r>
+              <a:t>Phase 2: Inventory &amp; Catalog Systems.</a:t>
+            </a:r>
+          </a:p>
+          <a:p>
+            <a:pPr>
+              <a:spcAft>
+                <a:spcPts val="1400"/>
+              </a:spcAft>
+              <a:defRPr sz="2000">
+                <a:solidFill>
+                  <a:srgbClr val="323232"/>
+                </a:solidFill>
+                <a:latin typeface="Calibri"/>
+              </a:defRPr>
+            </a:pPr>
+            <a:r>
+              <a:t>Phase 3: Map Discovery Features.</a:t>
+            </a:r>
+          </a:p>
+          <a:p>
+            <a:pPr>
+              <a:spcAft>
+                <a:spcPts val="1400"/>
+              </a:spcAft>
+              <a:defRPr sz="2000">
+                <a:solidFill>
+                  <a:srgbClr val="323232"/>
+                </a:solidFill>
+                <a:latin typeface="Calibri"/>
+              </a:defRPr>
+            </a:pPr>
+            <a:r>
+              <a:t>Phase 4: Optimization &amp; Analytics.</a:t>
+            </a:r>
+          </a:p>
+          <a:p>
+            <a:pPr>
+              <a:spcAft>
+                <a:spcPts val="1400"/>
+              </a:spcAft>
+              <a:defRPr sz="2000">
+                <a:solidFill>
+                  <a:srgbClr val="323232"/>
+                </a:solidFill>
+                <a:latin typeface="Calibri"/>
+              </a:defRPr>
+            </a:pPr>
+            <a:r>
+              <a:t>Testing: Rigorous validation of financial modules.</a:t>
+            </a:r>
+          </a:p>
+        </p:txBody>
+      </p:sp>
+      <p:sp>
+        <p:nvSpPr>
+          <p:cNvPr id="4" name="Rectangle 3"/>
+          <p:cNvSpPr/>
           <p:nvPr/>
         </p:nvSpPr>
         <p:spPr>
           <a:xfrm>
-            <a:off x="457200" y="274320"/>
-            <a:ext cx="8229600" cy="731520"/>
-          </a:xfrm>
-          <a:prstGeom prst="rect">
-            <a:avLst/>
-          </a:prstGeom>
-          <a:noFill/>
-        </p:spPr>
-        <p:txBody>
-          <a:bodyPr wrap="none">
-            <a:spAutoFit/>
-          </a:bodyPr>
-          <a:lstStyle/>
-          <a:p>
-            <a:pPr algn="ctr">
-              <a:defRPr sz="3600" b="1">
-                <a:solidFill>
-                  <a:srgbClr val="1E3A8A"/>
-                </a:solidFill>
-              </a:defRPr>
-            </a:pPr>
-            <a:r>
-              <a:t>DEVELOPMENT METHODOLOGY</a:t>
-            </a:r>
-          </a:p>
-        </p:txBody>
-      </p:sp>
-      <p:cxnSp>
-        <p:nvCxnSpPr>
-          <p:cNvPr id="3" name="Connector 2"/>
-          <p:cNvCxnSpPr/>
-          <p:nvPr/>
-        </p:nvCxnSpPr>
-        <p:spPr>
-          <a:xfrm>
-            <a:off x="1828800" y="914400"/>
-            <a:ext cx="5486400" cy="0"/>
-          </a:xfrm>
-          <a:prstGeom prst="line">
-            <a:avLst/>
-          </a:prstGeom>
-          <a:ln w="38100">
-            <a:solidFill>
-              <a:srgbClr val="1E3A8A"/>
-            </a:solidFill>
-          </a:ln>
-        </p:spPr>
-        <p:style>
-          <a:lnRef idx="2">
-            <a:schemeClr val="accent1"/>
-          </a:lnRef>
-          <a:fillRef idx="0">
-            <a:schemeClr val="accent1"/>
-          </a:fillRef>
-          <a:effectRef idx="1">
-            <a:schemeClr val="accent1"/>
-          </a:effectRef>
-          <a:fontRef idx="minor">
-            <a:schemeClr val="tx1"/>
-          </a:fontRef>
-        </p:style>
-      </p:cxnSp>
-      <p:sp>
-        <p:nvSpPr>
-          <p:cNvPr id="4" name="TextBox 3"/>
-          <p:cNvSpPr txBox="1"/>
-          <p:nvPr/>
-        </p:nvSpPr>
-        <p:spPr>
-          <a:xfrm>
-            <a:off x="914400" y="1188720"/>
-            <a:ext cx="7315200" cy="457200"/>
-          </a:xfrm>
-          <a:prstGeom prst="rect">
-            <a:avLst/>
-          </a:prstGeom>
-          <a:noFill/>
-        </p:spPr>
-        <p:txBody>
-          <a:bodyPr wrap="none">
-            <a:spAutoFit/>
-          </a:bodyPr>
-          <a:lstStyle/>
-          <a:p>
-            <a:pPr algn="ctr">
-              <a:defRPr sz="2200" b="1">
-                <a:solidFill>
-                  <a:srgbClr val="1E3A8A"/>
-                </a:solidFill>
-              </a:defRPr>
-            </a:pPr>
-            <a:r>
-              <a:t>Agile Scrum - 8 Week Development Sprint</a:t>
-            </a:r>
-          </a:p>
-        </p:txBody>
-      </p:sp>
-      <p:sp>
-        <p:nvSpPr>
-          <p:cNvPr id="5" name="Rectangle 4"/>
-          <p:cNvSpPr/>
-          <p:nvPr/>
-        </p:nvSpPr>
-        <p:spPr>
-          <a:xfrm>
-            <a:off x="1371600" y="1920240"/>
-            <a:ext cx="6400800" cy="640080"/>
+            <a:off x="457200" y="1188720"/>
+            <a:ext cx="8229600" cy="45720"/>
           </a:xfrm>
           <a:prstGeom prst="rect">
             <a:avLst/>
           </a:prstGeom>
           <a:solidFill>
-            <a:srgbClr val="DCFCE7"/>
+            <a:srgbClr val="16A085"/>
           </a:solidFill>
-          <a:ln w="25400">
-            <a:solidFill>
-              <a:srgbClr val="10B981"/>
-            </a:solidFill>
+          <a:ln>
+            <a:noFill/>
           </a:ln>
         </p:spPr>
         <p:style>
@@ -5379,361 +4395,10 @@
           </a:fontRef>
         </p:style>
         <p:txBody>
-          <a:bodyPr rtlCol="0" anchor="ctr" wrap="square"/>
-          <a:lstStyle/>
-          <a:p>
-            <a:pPr algn="ctr">
-              <a:defRPr sz="1400" b="1">
-                <a:solidFill>
-                  <a:srgbClr val="065F46"/>
-                </a:solidFill>
-              </a:defRPr>
-            </a:pPr>
-            <a:r>
-              <a:t>📋 Week 1: Requirements Analysis</a:t>
-            </a:r>
-          </a:p>
-          <a:p>
-            <a:pPr>
-              <a:defRPr sz="1100">
-                <a:solidFill>
-                  <a:srgbClr val="047857"/>
-                </a:solidFill>
-              </a:defRPr>
-            </a:pPr>
-            <a:r>
-              <a:t>Problem identification, market research, feature prioritization</a:t>
-            </a:r>
-          </a:p>
-        </p:txBody>
-      </p:sp>
-      <p:sp>
-        <p:nvSpPr>
-          <p:cNvPr id="6" name="Rectangle 5"/>
-          <p:cNvSpPr/>
-          <p:nvPr/>
-        </p:nvSpPr>
-        <p:spPr>
-          <a:xfrm>
-            <a:off x="1371600" y="2670048"/>
-            <a:ext cx="6400800" cy="640080"/>
-          </a:xfrm>
-          <a:prstGeom prst="rect">
-            <a:avLst/>
-          </a:prstGeom>
-          <a:solidFill>
-            <a:srgbClr val="DCFCE7"/>
-          </a:solidFill>
-          <a:ln w="25400">
-            <a:solidFill>
-              <a:srgbClr val="10B981"/>
-            </a:solidFill>
-          </a:ln>
-        </p:spPr>
-        <p:style>
-          <a:lnRef idx="1">
-            <a:schemeClr val="accent1"/>
-          </a:lnRef>
-          <a:fillRef idx="3">
-            <a:schemeClr val="accent1"/>
-          </a:fillRef>
-          <a:effectRef idx="2">
-            <a:schemeClr val="accent1"/>
-          </a:effectRef>
-          <a:fontRef idx="minor">
-            <a:schemeClr val="lt1"/>
-          </a:fontRef>
-        </p:style>
-        <p:txBody>
-          <a:bodyPr rtlCol="0" anchor="ctr" wrap="square"/>
-          <a:lstStyle/>
-          <a:p>
-            <a:pPr algn="ctr">
-              <a:defRPr sz="1400" b="1">
-                <a:solidFill>
-                  <a:srgbClr val="065F46"/>
-                </a:solidFill>
-              </a:defRPr>
-            </a:pPr>
-            <a:r>
-              <a:t>🎨 Week 2: Design</a:t>
-            </a:r>
-          </a:p>
-          <a:p>
-            <a:pPr>
-              <a:defRPr sz="1100">
-                <a:solidFill>
-                  <a:srgbClr val="047857"/>
-                </a:solidFill>
-              </a:defRPr>
-            </a:pPr>
-            <a:r>
-              <a:t>UI/UX wireframing, database schema, architecture design</a:t>
-            </a:r>
-          </a:p>
-        </p:txBody>
-      </p:sp>
-      <p:sp>
-        <p:nvSpPr>
-          <p:cNvPr id="7" name="Rectangle 6"/>
-          <p:cNvSpPr/>
-          <p:nvPr/>
-        </p:nvSpPr>
-        <p:spPr>
-          <a:xfrm>
-            <a:off x="1371600" y="3419856"/>
-            <a:ext cx="6400800" cy="640080"/>
-          </a:xfrm>
-          <a:prstGeom prst="rect">
-            <a:avLst/>
-          </a:prstGeom>
-          <a:solidFill>
-            <a:srgbClr val="DCFCE7"/>
-          </a:solidFill>
-          <a:ln w="25400">
-            <a:solidFill>
-              <a:srgbClr val="10B981"/>
-            </a:solidFill>
-          </a:ln>
-        </p:spPr>
-        <p:style>
-          <a:lnRef idx="1">
-            <a:schemeClr val="accent1"/>
-          </a:lnRef>
-          <a:fillRef idx="3">
-            <a:schemeClr val="accent1"/>
-          </a:fillRef>
-          <a:effectRef idx="2">
-            <a:schemeClr val="accent1"/>
-          </a:effectRef>
-          <a:fontRef idx="minor">
-            <a:schemeClr val="lt1"/>
-          </a:fontRef>
-        </p:style>
-        <p:txBody>
-          <a:bodyPr rtlCol="0" anchor="ctr" wrap="square"/>
-          <a:lstStyle/>
-          <a:p>
-            <a:pPr algn="ctr">
-              <a:defRPr sz="1400" b="1">
-                <a:solidFill>
-                  <a:srgbClr val="065F46"/>
-                </a:solidFill>
-              </a:defRPr>
-            </a:pPr>
-            <a:r>
-              <a:t>💻 Week 3-4: Core Development</a:t>
-            </a:r>
-          </a:p>
-          <a:p>
-            <a:pPr>
-              <a:defRPr sz="1100">
-                <a:solidFill>
-                  <a:srgbClr val="047857"/>
-                </a:solidFill>
-              </a:defRPr>
-            </a:pPr>
-            <a:r>
-              <a:t>Authentication, customer module, map integration, cart system</a:t>
-            </a:r>
-          </a:p>
-        </p:txBody>
-      </p:sp>
-      <p:sp>
-        <p:nvSpPr>
-          <p:cNvPr id="8" name="Rectangle 7"/>
-          <p:cNvSpPr/>
-          <p:nvPr/>
-        </p:nvSpPr>
-        <p:spPr>
-          <a:xfrm>
-            <a:off x="1371600" y="4169663"/>
-            <a:ext cx="6400800" cy="640080"/>
-          </a:xfrm>
-          <a:prstGeom prst="rect">
-            <a:avLst/>
-          </a:prstGeom>
-          <a:solidFill>
-            <a:srgbClr val="DCFCE7"/>
-          </a:solidFill>
-          <a:ln w="25400">
-            <a:solidFill>
-              <a:srgbClr val="10B981"/>
-            </a:solidFill>
-          </a:ln>
-        </p:spPr>
-        <p:style>
-          <a:lnRef idx="1">
-            <a:schemeClr val="accent1"/>
-          </a:lnRef>
-          <a:fillRef idx="3">
-            <a:schemeClr val="accent1"/>
-          </a:fillRef>
-          <a:effectRef idx="2">
-            <a:schemeClr val="accent1"/>
-          </a:effectRef>
-          <a:fontRef idx="minor">
-            <a:schemeClr val="lt1"/>
-          </a:fontRef>
-        </p:style>
-        <p:txBody>
-          <a:bodyPr rtlCol="0" anchor="ctr" wrap="square"/>
-          <a:lstStyle/>
-          <a:p>
-            <a:pPr algn="ctr">
-              <a:defRPr sz="1400" b="1">
-                <a:solidFill>
-                  <a:srgbClr val="065F46"/>
-                </a:solidFill>
-              </a:defRPr>
-            </a:pPr>
-            <a:r>
-              <a:t>🏪 Week 5-6: Shop Module</a:t>
-            </a:r>
-          </a:p>
-          <a:p>
-            <a:pPr>
-              <a:defRPr sz="1100">
-                <a:solidFill>
-                  <a:srgbClr val="047857"/>
-                </a:solidFill>
-              </a:defRPr>
-            </a:pPr>
-            <a:r>
-              <a:t>Dashboard, inventory management, billing, analytics</a:t>
-            </a:r>
-          </a:p>
-        </p:txBody>
-      </p:sp>
-      <p:sp>
-        <p:nvSpPr>
-          <p:cNvPr id="9" name="Rectangle 8"/>
-          <p:cNvSpPr/>
-          <p:nvPr/>
-        </p:nvSpPr>
-        <p:spPr>
-          <a:xfrm>
-            <a:off x="1371600" y="4919472"/>
-            <a:ext cx="6400800" cy="640080"/>
-          </a:xfrm>
-          <a:prstGeom prst="rect">
-            <a:avLst/>
-          </a:prstGeom>
-          <a:solidFill>
-            <a:srgbClr val="DCFCE7"/>
-          </a:solidFill>
-          <a:ln w="25400">
-            <a:solidFill>
-              <a:srgbClr val="10B981"/>
-            </a:solidFill>
-          </a:ln>
-        </p:spPr>
-        <p:style>
-          <a:lnRef idx="1">
-            <a:schemeClr val="accent1"/>
-          </a:lnRef>
-          <a:fillRef idx="3">
-            <a:schemeClr val="accent1"/>
-          </a:fillRef>
-          <a:effectRef idx="2">
-            <a:schemeClr val="accent1"/>
-          </a:effectRef>
-          <a:fontRef idx="minor">
-            <a:schemeClr val="lt1"/>
-          </a:fontRef>
-        </p:style>
-        <p:txBody>
-          <a:bodyPr rtlCol="0" anchor="ctr" wrap="square"/>
-          <a:lstStyle/>
-          <a:p>
-            <a:pPr algn="ctr">
-              <a:defRPr sz="1400" b="1">
-                <a:solidFill>
-                  <a:srgbClr val="065F46"/>
-                </a:solidFill>
-              </a:defRPr>
-            </a:pPr>
-            <a:r>
-              <a:t>✅ Week 7: Testing &amp; QA</a:t>
-            </a:r>
-          </a:p>
-          <a:p>
-            <a:pPr>
-              <a:defRPr sz="1100">
-                <a:solidFill>
-                  <a:srgbClr val="047857"/>
-                </a:solidFill>
-              </a:defRPr>
-            </a:pPr>
-            <a:r>
-              <a:t>Unit testing, integration testing, bug fixes, optimization</a:t>
-            </a:r>
-          </a:p>
-        </p:txBody>
-      </p:sp>
-      <p:sp>
-        <p:nvSpPr>
-          <p:cNvPr id="10" name="Rectangle 9"/>
-          <p:cNvSpPr/>
-          <p:nvPr/>
-        </p:nvSpPr>
-        <p:spPr>
-          <a:xfrm>
-            <a:off x="1371600" y="5669280"/>
-            <a:ext cx="6400800" cy="640080"/>
-          </a:xfrm>
-          <a:prstGeom prst="rect">
-            <a:avLst/>
-          </a:prstGeom>
-          <a:solidFill>
-            <a:srgbClr val="DCFCE7"/>
-          </a:solidFill>
-          <a:ln w="25400">
-            <a:solidFill>
-              <a:srgbClr val="10B981"/>
-            </a:solidFill>
-          </a:ln>
-        </p:spPr>
-        <p:style>
-          <a:lnRef idx="1">
-            <a:schemeClr val="accent1"/>
-          </a:lnRef>
-          <a:fillRef idx="3">
-            <a:schemeClr val="accent1"/>
-          </a:fillRef>
-          <a:effectRef idx="2">
-            <a:schemeClr val="accent1"/>
-          </a:effectRef>
-          <a:fontRef idx="minor">
-            <a:schemeClr val="lt1"/>
-          </a:fontRef>
-        </p:style>
-        <p:txBody>
-          <a:bodyPr rtlCol="0" anchor="ctr" wrap="square"/>
-          <a:lstStyle/>
-          <a:p>
-            <a:pPr algn="ctr">
-              <a:defRPr sz="1400" b="1">
-                <a:solidFill>
-                  <a:srgbClr val="065F46"/>
-                </a:solidFill>
-              </a:defRPr>
-            </a:pPr>
-            <a:r>
-              <a:t>🚀 Week 8: Deployment</a:t>
-            </a:r>
-          </a:p>
-          <a:p>
-            <a:pPr>
-              <a:defRPr sz="1100">
-                <a:solidFill>
-                  <a:srgbClr val="047857"/>
-                </a:solidFill>
-              </a:defRPr>
-            </a:pPr>
-            <a:r>
-              <a:t>APK building, documentation, user manual, release</a:t>
-            </a:r>
+          <a:bodyPr rtlCol="0" anchor="ctr"/>
+          <a:lstStyle/>
+          <a:p>
+            <a:pPr algn="ctr"/>
           </a:p>
         </p:txBody>
       </p:sp>
@@ -5765,74 +4430,114 @@
       <p:grpSpPr/>
       <p:sp>
         <p:nvSpPr>
-          <p:cNvPr id="2" name="TextBox 1"/>
-          <p:cNvSpPr txBox="1"/>
-          <p:nvPr/>
-        </p:nvSpPr>
-        <p:spPr>
-          <a:xfrm>
-            <a:off x="457200" y="274320"/>
-            <a:ext cx="8229600" cy="731520"/>
-          </a:xfrm>
-          <a:prstGeom prst="rect">
-            <a:avLst/>
-          </a:prstGeom>
-          <a:noFill/>
-        </p:spPr>
-        <p:txBody>
-          <a:bodyPr wrap="none">
-            <a:spAutoFit/>
-          </a:bodyPr>
-          <a:lstStyle/>
-          <a:p>
-            <a:pPr algn="ctr">
-              <a:defRPr sz="3600" b="1">
-                <a:solidFill>
-                  <a:srgbClr val="1E3A8A"/>
-                </a:solidFill>
-              </a:defRPr>
-            </a:pPr>
-            <a:r>
-              <a:t>KEY ALGORITHMS IMPLEMENTED</a:t>
-            </a:r>
-          </a:p>
-        </p:txBody>
-      </p:sp>
-      <p:cxnSp>
-        <p:nvCxnSpPr>
-          <p:cNvPr id="3" name="Connector 2"/>
-          <p:cNvCxnSpPr/>
-          <p:nvPr/>
-        </p:nvCxnSpPr>
-        <p:spPr>
-          <a:xfrm>
-            <a:off x="1828800" y="914400"/>
-            <a:ext cx="5486400" cy="0"/>
-          </a:xfrm>
-          <a:prstGeom prst="line">
-            <a:avLst/>
-          </a:prstGeom>
-          <a:ln w="38100">
-            <a:solidFill>
-              <a:srgbClr val="1E3A8A"/>
-            </a:solidFill>
-          </a:ln>
-        </p:spPr>
-        <p:style>
-          <a:lnRef idx="2">
-            <a:schemeClr val="accent1"/>
-          </a:lnRef>
-          <a:fillRef idx="0">
-            <a:schemeClr val="accent1"/>
-          </a:fillRef>
-          <a:effectRef idx="1">
-            <a:schemeClr val="accent1"/>
-          </a:effectRef>
-          <a:fontRef idx="minor">
-            <a:schemeClr val="tx1"/>
-          </a:fontRef>
-        </p:style>
-      </p:cxnSp>
+          <p:cNvPr id="2" name="Title 1"/>
+          <p:cNvSpPr>
+            <a:spLocks noGrp="1"/>
+          </p:cNvSpPr>
+          <p:nvPr>
+            <p:ph type="title"/>
+          </p:nvPr>
+        </p:nvSpPr>
+        <p:spPr/>
+        <p:txBody>
+          <a:bodyPr/>
+          <a:lstStyle/>
+          <a:p>
+            <a:pPr algn="l">
+              <a:defRPr sz="3600">
+                <a:solidFill>
+                  <a:srgbClr val="2C3E50"/>
+                </a:solidFill>
+                <a:latin typeface="Calibri"/>
+              </a:defRPr>
+            </a:pPr>
+            <a:r>
+              <a:t>KEY ALGORITHMS</a:t>
+            </a:r>
+          </a:p>
+        </p:txBody>
+      </p:sp>
+      <p:sp>
+        <p:nvSpPr>
+          <p:cNvPr id="3" name="Content Placeholder 2"/>
+          <p:cNvSpPr>
+            <a:spLocks noGrp="1"/>
+          </p:cNvSpPr>
+          <p:nvPr>
+            <p:ph idx="1"/>
+          </p:nvPr>
+        </p:nvSpPr>
+        <p:spPr/>
+        <p:txBody>
+          <a:bodyPr/>
+          <a:lstStyle/>
+          <a:p/>
+          <a:p>
+            <a:pPr>
+              <a:spcAft>
+                <a:spcPts val="1400"/>
+              </a:spcAft>
+              <a:defRPr sz="2000">
+                <a:solidFill>
+                  <a:srgbClr val="323232"/>
+                </a:solidFill>
+                <a:latin typeface="Calibri"/>
+              </a:defRPr>
+            </a:pPr>
+            <a:r>
+              <a:t>Haversine Formula: Geospatial sorting for 'Nearby Shops'.</a:t>
+            </a:r>
+          </a:p>
+          <a:p>
+            <a:pPr>
+              <a:spcAft>
+                <a:spcPts val="1400"/>
+              </a:spcAft>
+              <a:defRPr sz="2000">
+                <a:solidFill>
+                  <a:srgbClr val="323232"/>
+                </a:solidFill>
+                <a:latin typeface="Calibri"/>
+              </a:defRPr>
+            </a:pPr>
+            <a:r>
+              <a:t>Fuzzy Search (Levenshtein): Handling typos in product search.</a:t>
+            </a:r>
+          </a:p>
+          <a:p>
+            <a:pPr>
+              <a:spcAft>
+                <a:spcPts val="1400"/>
+              </a:spcAft>
+              <a:defRPr sz="2000">
+                <a:solidFill>
+                  <a:srgbClr val="323232"/>
+                </a:solidFill>
+                <a:latin typeface="Calibri"/>
+              </a:defRPr>
+            </a:pPr>
+            <a:r>
+              <a:t>Inventory Reconciliation: Linking POS to Inventory atomically.</a:t>
+            </a:r>
+          </a:p>
+          <a:p>
+            <a:pPr>
+              <a:spcAft>
+                <a:spcPts val="1400"/>
+              </a:spcAft>
+              <a:defRPr sz="2000">
+                <a:solidFill>
+                  <a:srgbClr val="323232"/>
+                </a:solidFill>
+                <a:latin typeface="Calibri"/>
+              </a:defRPr>
+            </a:pPr>
+            <a:r>
+              <a:t>Temporal Aggregation: Grouping sales data for Analytics.</a:t>
+            </a:r>
+          </a:p>
+        </p:txBody>
+      </p:sp>
       <p:sp>
         <p:nvSpPr>
           <p:cNvPr id="4" name="Rectangle 3"/>
@@ -5841,19 +4546,17 @@
         </p:nvSpPr>
         <p:spPr>
           <a:xfrm>
-            <a:off x="457200" y="1828800"/>
-            <a:ext cx="2651760" cy="2011680"/>
+            <a:off x="457200" y="1188720"/>
+            <a:ext cx="8229600" cy="45720"/>
           </a:xfrm>
           <a:prstGeom prst="rect">
             <a:avLst/>
           </a:prstGeom>
           <a:solidFill>
-            <a:srgbClr val="F8FAFC"/>
+            <a:srgbClr val="16A085"/>
           </a:solidFill>
-          <a:ln w="25400">
-            <a:solidFill>
-              <a:srgbClr val="E2E8F0"/>
-            </a:solidFill>
+          <a:ln>
+            <a:noFill/>
           </a:ln>
         </p:spPr>
         <p:style>
@@ -5871,469 +4574,10 @@
           </a:fontRef>
         </p:style>
         <p:txBody>
-          <a:bodyPr rtlCol="0" anchor="ctr" wrap="square"/>
-          <a:lstStyle/>
-          <a:p>
-            <a:pPr algn="ctr">
-              <a:defRPr sz="1400" b="1">
-                <a:solidFill>
-                  <a:srgbClr val="1E3A8A"/>
-                </a:solidFill>
-              </a:defRPr>
-            </a:pPr>
-            <a:r>
-              <a:t>📍 Haversine Formula</a:t>
-            </a:r>
-          </a:p>
-          <a:p>
-            <a:pPr>
-              <a:spcBef>
-                <a:spcPts val="600"/>
-              </a:spcBef>
-              <a:defRPr sz="1100">
-                <a:solidFill>
-                  <a:srgbClr val="64748B"/>
-                </a:solidFill>
-              </a:defRPr>
-            </a:pPr>
-            <a:r>
-              <a:t>Distance Calculation</a:t>
-            </a:r>
-          </a:p>
-          <a:p>
-            <a:pPr>
-              <a:spcBef>
-                <a:spcPts val="800"/>
-              </a:spcBef>
-              <a:defRPr sz="1200" b="1">
-                <a:solidFill>
-                  <a:srgbClr val="3B82F6"/>
-                </a:solidFill>
-              </a:defRPr>
-            </a:pPr>
-            <a:r>
-              <a:t>O(1)</a:t>
-            </a:r>
-          </a:p>
-        </p:txBody>
-      </p:sp>
-      <p:sp>
-        <p:nvSpPr>
-          <p:cNvPr id="5" name="Rectangle 4"/>
-          <p:cNvSpPr/>
-          <p:nvPr/>
-        </p:nvSpPr>
-        <p:spPr>
-          <a:xfrm>
-            <a:off x="3291840" y="1828800"/>
-            <a:ext cx="2651760" cy="2011680"/>
-          </a:xfrm>
-          <a:prstGeom prst="rect">
-            <a:avLst/>
-          </a:prstGeom>
-          <a:solidFill>
-            <a:srgbClr val="F8FAFC"/>
-          </a:solidFill>
-          <a:ln w="25400">
-            <a:solidFill>
-              <a:srgbClr val="E2E8F0"/>
-            </a:solidFill>
-          </a:ln>
-        </p:spPr>
-        <p:style>
-          <a:lnRef idx="1">
-            <a:schemeClr val="accent1"/>
-          </a:lnRef>
-          <a:fillRef idx="3">
-            <a:schemeClr val="accent1"/>
-          </a:fillRef>
-          <a:effectRef idx="2">
-            <a:schemeClr val="accent1"/>
-          </a:effectRef>
-          <a:fontRef idx="minor">
-            <a:schemeClr val="lt1"/>
-          </a:fontRef>
-        </p:style>
-        <p:txBody>
-          <a:bodyPr rtlCol="0" anchor="ctr" wrap="square"/>
-          <a:lstStyle/>
-          <a:p>
-            <a:pPr algn="ctr">
-              <a:defRPr sz="1400" b="1">
-                <a:solidFill>
-                  <a:srgbClr val="1E3A8A"/>
-                </a:solidFill>
-              </a:defRPr>
-            </a:pPr>
-            <a:r>
-              <a:t>🔍 Fuzzy Search</a:t>
-            </a:r>
-          </a:p>
-          <a:p>
-            <a:pPr>
-              <a:spcBef>
-                <a:spcPts val="600"/>
-              </a:spcBef>
-              <a:defRPr sz="1100">
-                <a:solidFill>
-                  <a:srgbClr val="64748B"/>
-                </a:solidFill>
-              </a:defRPr>
-            </a:pPr>
-            <a:r>
-              <a:t>Multi-field Matching</a:t>
-            </a:r>
-          </a:p>
-          <a:p>
-            <a:pPr>
-              <a:spcBef>
-                <a:spcPts val="800"/>
-              </a:spcBef>
-              <a:defRPr sz="1200" b="1">
-                <a:solidFill>
-                  <a:srgbClr val="3B82F6"/>
-                </a:solidFill>
-              </a:defRPr>
-            </a:pPr>
-            <a:r>
-              <a:t>O(n×m)</a:t>
-            </a:r>
-          </a:p>
-        </p:txBody>
-      </p:sp>
-      <p:sp>
-        <p:nvSpPr>
-          <p:cNvPr id="6" name="Rectangle 5"/>
-          <p:cNvSpPr/>
-          <p:nvPr/>
-        </p:nvSpPr>
-        <p:spPr>
-          <a:xfrm>
-            <a:off x="6126480" y="1828800"/>
-            <a:ext cx="2651760" cy="2011680"/>
-          </a:xfrm>
-          <a:prstGeom prst="rect">
-            <a:avLst/>
-          </a:prstGeom>
-          <a:solidFill>
-            <a:srgbClr val="F8FAFC"/>
-          </a:solidFill>
-          <a:ln w="25400">
-            <a:solidFill>
-              <a:srgbClr val="E2E8F0"/>
-            </a:solidFill>
-          </a:ln>
-        </p:spPr>
-        <p:style>
-          <a:lnRef idx="1">
-            <a:schemeClr val="accent1"/>
-          </a:lnRef>
-          <a:fillRef idx="3">
-            <a:schemeClr val="accent1"/>
-          </a:fillRef>
-          <a:effectRef idx="2">
-            <a:schemeClr val="accent1"/>
-          </a:effectRef>
-          <a:fontRef idx="minor">
-            <a:schemeClr val="lt1"/>
-          </a:fontRef>
-        </p:style>
-        <p:txBody>
-          <a:bodyPr rtlCol="0" anchor="ctr" wrap="square"/>
-          <a:lstStyle/>
-          <a:p>
-            <a:pPr algn="ctr">
-              <a:defRPr sz="1400" b="1">
-                <a:solidFill>
-                  <a:srgbClr val="1E3A8A"/>
-                </a:solidFill>
-              </a:defRPr>
-            </a:pPr>
-            <a:r>
-              <a:t>📝 Levenshtein Distance</a:t>
-            </a:r>
-          </a:p>
-          <a:p>
-            <a:pPr>
-              <a:spcBef>
-                <a:spcPts val="600"/>
-              </a:spcBef>
-              <a:defRPr sz="1100">
-                <a:solidFill>
-                  <a:srgbClr val="64748B"/>
-                </a:solidFill>
-              </a:defRPr>
-            </a:pPr>
-            <a:r>
-              <a:t>Edit Distance</a:t>
-            </a:r>
-          </a:p>
-          <a:p>
-            <a:pPr>
-              <a:spcBef>
-                <a:spcPts val="800"/>
-              </a:spcBef>
-              <a:defRPr sz="1200" b="1">
-                <a:solidFill>
-                  <a:srgbClr val="3B82F6"/>
-                </a:solidFill>
-              </a:defRPr>
-            </a:pPr>
-            <a:r>
-              <a:t>O(n×m)</a:t>
-            </a:r>
-          </a:p>
-        </p:txBody>
-      </p:sp>
-      <p:sp>
-        <p:nvSpPr>
-          <p:cNvPr id="7" name="Rectangle 6"/>
-          <p:cNvSpPr/>
-          <p:nvPr/>
-        </p:nvSpPr>
-        <p:spPr>
-          <a:xfrm>
-            <a:off x="457200" y="4114800"/>
-            <a:ext cx="2651760" cy="2011680"/>
-          </a:xfrm>
-          <a:prstGeom prst="rect">
-            <a:avLst/>
-          </a:prstGeom>
-          <a:solidFill>
-            <a:srgbClr val="F8FAFC"/>
-          </a:solidFill>
-          <a:ln w="25400">
-            <a:solidFill>
-              <a:srgbClr val="E2E8F0"/>
-            </a:solidFill>
-          </a:ln>
-        </p:spPr>
-        <p:style>
-          <a:lnRef idx="1">
-            <a:schemeClr val="accent1"/>
-          </a:lnRef>
-          <a:fillRef idx="3">
-            <a:schemeClr val="accent1"/>
-          </a:fillRef>
-          <a:effectRef idx="2">
-            <a:schemeClr val="accent1"/>
-          </a:effectRef>
-          <a:fontRef idx="minor">
-            <a:schemeClr val="lt1"/>
-          </a:fontRef>
-        </p:style>
-        <p:txBody>
-          <a:bodyPr rtlCol="0" anchor="ctr" wrap="square"/>
-          <a:lstStyle/>
-          <a:p>
-            <a:pPr algn="ctr">
-              <a:defRPr sz="1400" b="1">
-                <a:solidFill>
-                  <a:srgbClr val="1E3A8A"/>
-                </a:solidFill>
-              </a:defRPr>
-            </a:pPr>
-            <a:r>
-              <a:t>📦 Inventory Management</a:t>
-            </a:r>
-          </a:p>
-          <a:p>
-            <a:pPr>
-              <a:spcBef>
-                <a:spcPts val="600"/>
-              </a:spcBef>
-              <a:defRPr sz="1100">
-                <a:solidFill>
-                  <a:srgbClr val="64748B"/>
-                </a:solidFill>
-              </a:defRPr>
-            </a:pPr>
-            <a:r>
-              <a:t>Stock Tracking</a:t>
-            </a:r>
-          </a:p>
-          <a:p>
-            <a:pPr>
-              <a:spcBef>
-                <a:spcPts val="800"/>
-              </a:spcBef>
-              <a:defRPr sz="1200" b="1">
-                <a:solidFill>
-                  <a:srgbClr val="3B82F6"/>
-                </a:solidFill>
-              </a:defRPr>
-            </a:pPr>
-            <a:r>
-              <a:t>O(n)</a:t>
-            </a:r>
-          </a:p>
-        </p:txBody>
-      </p:sp>
-      <p:sp>
-        <p:nvSpPr>
-          <p:cNvPr id="8" name="Rectangle 7"/>
-          <p:cNvSpPr/>
-          <p:nvPr/>
-        </p:nvSpPr>
-        <p:spPr>
-          <a:xfrm>
-            <a:off x="3291840" y="4114800"/>
-            <a:ext cx="2651760" cy="2011680"/>
-          </a:xfrm>
-          <a:prstGeom prst="rect">
-            <a:avLst/>
-          </a:prstGeom>
-          <a:solidFill>
-            <a:srgbClr val="F8FAFC"/>
-          </a:solidFill>
-          <a:ln w="25400">
-            <a:solidFill>
-              <a:srgbClr val="E2E8F0"/>
-            </a:solidFill>
-          </a:ln>
-        </p:spPr>
-        <p:style>
-          <a:lnRef idx="1">
-            <a:schemeClr val="accent1"/>
-          </a:lnRef>
-          <a:fillRef idx="3">
-            <a:schemeClr val="accent1"/>
-          </a:fillRef>
-          <a:effectRef idx="2">
-            <a:schemeClr val="accent1"/>
-          </a:effectRef>
-          <a:fontRef idx="minor">
-            <a:schemeClr val="lt1"/>
-          </a:fontRef>
-        </p:style>
-        <p:txBody>
-          <a:bodyPr rtlCol="0" anchor="ctr" wrap="square"/>
-          <a:lstStyle/>
-          <a:p>
-            <a:pPr algn="ctr">
-              <a:defRPr sz="1400" b="1">
-                <a:solidFill>
-                  <a:srgbClr val="1E3A8A"/>
-                </a:solidFill>
-              </a:defRPr>
-            </a:pPr>
-            <a:r>
-              <a:t>📊 Sales Analytics</a:t>
-            </a:r>
-          </a:p>
-          <a:p>
-            <a:pPr>
-              <a:spcBef>
-                <a:spcPts val="600"/>
-              </a:spcBef>
-              <a:defRPr sz="1100">
-                <a:solidFill>
-                  <a:srgbClr val="64748B"/>
-                </a:solidFill>
-              </a:defRPr>
-            </a:pPr>
-            <a:r>
-              <a:t>Time-series</a:t>
-            </a:r>
-          </a:p>
-          <a:p>
-            <a:pPr>
-              <a:spcBef>
-                <a:spcPts val="800"/>
-              </a:spcBef>
-              <a:defRPr sz="1200" b="1">
-                <a:solidFill>
-                  <a:srgbClr val="3B82F6"/>
-                </a:solidFill>
-              </a:defRPr>
-            </a:pPr>
-            <a:r>
-              <a:t>O(n log n)</a:t>
-            </a:r>
-          </a:p>
-        </p:txBody>
-      </p:sp>
-      <p:sp>
-        <p:nvSpPr>
-          <p:cNvPr id="9" name="Rectangle 8"/>
-          <p:cNvSpPr/>
-          <p:nvPr/>
-        </p:nvSpPr>
-        <p:spPr>
-          <a:xfrm>
-            <a:off x="6126480" y="4114800"/>
-            <a:ext cx="2651760" cy="2011680"/>
-          </a:xfrm>
-          <a:prstGeom prst="rect">
-            <a:avLst/>
-          </a:prstGeom>
-          <a:solidFill>
-            <a:srgbClr val="F8FAFC"/>
-          </a:solidFill>
-          <a:ln w="25400">
-            <a:solidFill>
-              <a:srgbClr val="E2E8F0"/>
-            </a:solidFill>
-          </a:ln>
-        </p:spPr>
-        <p:style>
-          <a:lnRef idx="1">
-            <a:schemeClr val="accent1"/>
-          </a:lnRef>
-          <a:fillRef idx="3">
-            <a:schemeClr val="accent1"/>
-          </a:fillRef>
-          <a:effectRef idx="2">
-            <a:schemeClr val="accent1"/>
-          </a:effectRef>
-          <a:fontRef idx="minor">
-            <a:schemeClr val="lt1"/>
-          </a:fontRef>
-        </p:style>
-        <p:txBody>
-          <a:bodyPr rtlCol="0" anchor="ctr" wrap="square"/>
-          <a:lstStyle/>
-          <a:p>
-            <a:pPr algn="ctr">
-              <a:defRPr sz="1400" b="1">
-                <a:solidFill>
-                  <a:srgbClr val="1E3A8A"/>
-                </a:solidFill>
-              </a:defRPr>
-            </a:pPr>
-            <a:r>
-              <a:t>⚡ QuickSort</a:t>
-            </a:r>
-          </a:p>
-          <a:p>
-            <a:pPr>
-              <a:spcBef>
-                <a:spcPts val="600"/>
-              </a:spcBef>
-              <a:defRPr sz="1100">
-                <a:solidFill>
-                  <a:srgbClr val="64748B"/>
-                </a:solidFill>
-              </a:defRPr>
-            </a:pPr>
-            <a:r>
-              <a:t>Distance Sorting</a:t>
-            </a:r>
-          </a:p>
-          <a:p>
-            <a:pPr>
-              <a:spcBef>
-                <a:spcPts val="800"/>
-              </a:spcBef>
-              <a:defRPr sz="1200" b="1">
-                <a:solidFill>
-                  <a:srgbClr val="3B82F6"/>
-                </a:solidFill>
-              </a:defRPr>
-            </a:pPr>
-            <a:r>
-              <a:t>O(n log n)</a:t>
-            </a:r>
+          <a:bodyPr rtlCol="0" anchor="ctr"/>
+          <a:lstStyle/>
+          <a:p>
+            <a:pPr algn="ctr"/>
           </a:p>
         </p:txBody>
       </p:sp>
@@ -6365,282 +4609,182 @@
       <p:grpSpPr/>
       <p:sp>
         <p:nvSpPr>
-          <p:cNvPr id="2" name="TextBox 1"/>
-          <p:cNvSpPr txBox="1"/>
+          <p:cNvPr id="2" name="Title 1"/>
+          <p:cNvSpPr>
+            <a:spLocks noGrp="1"/>
+          </p:cNvSpPr>
+          <p:nvPr>
+            <p:ph type="title"/>
+          </p:nvPr>
+        </p:nvSpPr>
+        <p:spPr/>
+        <p:txBody>
+          <a:bodyPr/>
+          <a:lstStyle/>
+          <a:p>
+            <a:pPr algn="l">
+              <a:defRPr sz="3600">
+                <a:solidFill>
+                  <a:srgbClr val="2C3E50"/>
+                </a:solidFill>
+                <a:latin typeface="Calibri"/>
+              </a:defRPr>
+            </a:pPr>
+            <a:r>
+              <a:t>EXPECTED OUTPUT &amp; RESULTS</a:t>
+            </a:r>
+          </a:p>
+        </p:txBody>
+      </p:sp>
+      <p:sp>
+        <p:nvSpPr>
+          <p:cNvPr id="3" name="Content Placeholder 2"/>
+          <p:cNvSpPr>
+            <a:spLocks noGrp="1"/>
+          </p:cNvSpPr>
+          <p:nvPr>
+            <p:ph idx="1"/>
+          </p:nvPr>
+        </p:nvSpPr>
+        <p:spPr/>
+        <p:txBody>
+          <a:bodyPr/>
+          <a:lstStyle/>
+          <a:p/>
+          <a:p>
+            <a:pPr>
+              <a:spcAft>
+                <a:spcPts val="1400"/>
+              </a:spcAft>
+              <a:defRPr sz="2000">
+                <a:solidFill>
+                  <a:srgbClr val="323232"/>
+                </a:solidFill>
+                <a:latin typeface="Calibri"/>
+              </a:defRPr>
+            </a:pPr>
+            <a:r>
+              <a:t>Shop Owner Benefits:</a:t>
+            </a:r>
+          </a:p>
+          <a:p>
+            <a:pPr lvl="1">
+              <a:spcAft>
+                <a:spcPts val="1400"/>
+              </a:spcAft>
+              <a:defRPr sz="1800">
+                <a:solidFill>
+                  <a:srgbClr val="323232"/>
+                </a:solidFill>
+                <a:latin typeface="Calibri"/>
+              </a:defRPr>
+            </a:pPr>
+            <a:r>
+              <a:t>Digital Dashboard &amp; Rapid Billing.</a:t>
+            </a:r>
+          </a:p>
+          <a:p>
+            <a:pPr lvl="1">
+              <a:spcAft>
+                <a:spcPts val="1400"/>
+              </a:spcAft>
+              <a:defRPr sz="1800">
+                <a:solidFill>
+                  <a:srgbClr val="323232"/>
+                </a:solidFill>
+                <a:latin typeface="Calibri"/>
+              </a:defRPr>
+            </a:pPr>
+            <a:r>
+              <a:t>30-second Product Onboarding.</a:t>
+            </a:r>
+          </a:p>
+          <a:p>
+            <a:pPr>
+              <a:spcAft>
+                <a:spcPts val="1400"/>
+              </a:spcAft>
+              <a:defRPr sz="2000">
+                <a:solidFill>
+                  <a:srgbClr val="323232"/>
+                </a:solidFill>
+                <a:latin typeface="Calibri"/>
+              </a:defRPr>
+            </a:pPr>
+            <a:r>
+              <a:t>Customer Benefits:</a:t>
+            </a:r>
+          </a:p>
+          <a:p>
+            <a:pPr lvl="1">
+              <a:spcAft>
+                <a:spcPts val="1400"/>
+              </a:spcAft>
+              <a:defRPr sz="1800">
+                <a:solidFill>
+                  <a:srgbClr val="323232"/>
+                </a:solidFill>
+                <a:latin typeface="Calibri"/>
+              </a:defRPr>
+            </a:pPr>
+            <a:r>
+              <a:t>Seamless Map Discovery.</a:t>
+            </a:r>
+          </a:p>
+          <a:p>
+            <a:pPr lvl="1">
+              <a:spcAft>
+                <a:spcPts val="1400"/>
+              </a:spcAft>
+              <a:defRPr sz="1800">
+                <a:solidFill>
+                  <a:srgbClr val="323232"/>
+                </a:solidFill>
+                <a:latin typeface="Calibri"/>
+              </a:defRPr>
+            </a:pPr>
+            <a:r>
+              <a:t>Cross-store Product Search.</a:t>
+            </a:r>
+          </a:p>
+          <a:p>
+            <a:pPr lvl="1">
+              <a:spcAft>
+                <a:spcPts val="1400"/>
+              </a:spcAft>
+              <a:defRPr sz="1800">
+                <a:solidFill>
+                  <a:srgbClr val="323232"/>
+                </a:solidFill>
+                <a:latin typeface="Calibri"/>
+              </a:defRPr>
+            </a:pPr>
+            <a:r>
+              <a:t>Persistent Cart Management.</a:t>
+            </a:r>
+          </a:p>
+        </p:txBody>
+      </p:sp>
+      <p:sp>
+        <p:nvSpPr>
+          <p:cNvPr id="4" name="Rectangle 3"/>
+          <p:cNvSpPr/>
           <p:nvPr/>
         </p:nvSpPr>
         <p:spPr>
           <a:xfrm>
-            <a:off x="457200" y="274320"/>
-            <a:ext cx="8229600" cy="731520"/>
-          </a:xfrm>
-          <a:prstGeom prst="rect">
-            <a:avLst/>
-          </a:prstGeom>
-          <a:noFill/>
-        </p:spPr>
-        <p:txBody>
-          <a:bodyPr wrap="none">
-            <a:spAutoFit/>
-          </a:bodyPr>
-          <a:lstStyle/>
-          <a:p>
-            <a:pPr algn="ctr">
-              <a:defRPr sz="3600" b="1">
-                <a:solidFill>
-                  <a:srgbClr val="1E3A8A"/>
-                </a:solidFill>
-              </a:defRPr>
-            </a:pPr>
-            <a:r>
-              <a:t>EXPECTED OUTPUT &amp; RESULTS</a:t>
-            </a:r>
-          </a:p>
-        </p:txBody>
-      </p:sp>
-      <p:cxnSp>
-        <p:nvCxnSpPr>
-          <p:cNvPr id="3" name="Connector 2"/>
-          <p:cNvCxnSpPr/>
-          <p:nvPr/>
-        </p:nvCxnSpPr>
-        <p:spPr>
-          <a:xfrm>
-            <a:off x="1828800" y="914400"/>
-            <a:ext cx="5486400" cy="0"/>
-          </a:xfrm>
-          <a:prstGeom prst="line">
-            <a:avLst/>
-          </a:prstGeom>
-          <a:ln w="38100">
-            <a:solidFill>
-              <a:srgbClr val="1E3A8A"/>
-            </a:solidFill>
-          </a:ln>
-        </p:spPr>
-        <p:style>
-          <a:lnRef idx="2">
-            <a:schemeClr val="accent1"/>
-          </a:lnRef>
-          <a:fillRef idx="0">
-            <a:schemeClr val="accent1"/>
-          </a:fillRef>
-          <a:effectRef idx="1">
-            <a:schemeClr val="accent1"/>
-          </a:effectRef>
-          <a:fontRef idx="minor">
-            <a:schemeClr val="tx1"/>
-          </a:fontRef>
-        </p:style>
-      </p:cxnSp>
-      <p:sp>
-        <p:nvSpPr>
-          <p:cNvPr id="4" name="TextBox 3"/>
-          <p:cNvSpPr txBox="1"/>
-          <p:nvPr/>
-        </p:nvSpPr>
-        <p:spPr>
-          <a:xfrm>
-            <a:off x="457200" y="1645920"/>
-            <a:ext cx="4114800" cy="2743200"/>
-          </a:xfrm>
-          <a:prstGeom prst="rect">
-            <a:avLst/>
-          </a:prstGeom>
-          <a:noFill/>
-        </p:spPr>
-        <p:txBody>
-          <a:bodyPr wrap="none">
-            <a:spAutoFit/>
-          </a:bodyPr>
-          <a:lstStyle/>
-          <a:p>
-            <a:pPr>
-              <a:defRPr sz="2000" b="1">
-                <a:solidFill>
-                  <a:srgbClr val="1E3A8A"/>
-                </a:solidFill>
-              </a:defRPr>
-            </a:pPr>
-            <a:r>
-              <a:t>🛍️ Customer Experience</a:t>
-            </a:r>
-          </a:p>
-          <a:p>
-            <a:pPr>
-              <a:spcBef>
-                <a:spcPts val="800"/>
-              </a:spcBef>
-              <a:defRPr sz="1400">
-                <a:solidFill>
-                  <a:srgbClr val="334155"/>
-                </a:solidFill>
-              </a:defRPr>
-            </a:pPr>
-            <a:r>
-              <a:t>• Interactive map with nearby shops</a:t>
-            </a:r>
-          </a:p>
-          <a:p>
-            <a:pPr>
-              <a:spcBef>
-                <a:spcPts val="800"/>
-              </a:spcBef>
-              <a:defRPr sz="1400">
-                <a:solidFill>
-                  <a:srgbClr val="334155"/>
-                </a:solidFill>
-              </a:defRPr>
-            </a:pPr>
-            <a:r>
-              <a:t>• Product search with auto-suggestions</a:t>
-            </a:r>
-          </a:p>
-          <a:p>
-            <a:pPr>
-              <a:spcBef>
-                <a:spcPts val="800"/>
-              </a:spcBef>
-              <a:defRPr sz="1400">
-                <a:solidFill>
-                  <a:srgbClr val="334155"/>
-                </a:solidFill>
-              </a:defRPr>
-            </a:pPr>
-            <a:r>
-              <a:t>• Shopping cart with tax calculations</a:t>
-            </a:r>
-          </a:p>
-          <a:p>
-            <a:pPr>
-              <a:spcBef>
-                <a:spcPts val="800"/>
-              </a:spcBef>
-              <a:defRPr sz="1400">
-                <a:solidFill>
-                  <a:srgbClr val="334155"/>
-                </a:solidFill>
-              </a:defRPr>
-            </a:pPr>
-            <a:r>
-              <a:t>• Real-time stock availability</a:t>
-            </a:r>
-          </a:p>
-        </p:txBody>
-      </p:sp>
-      <p:sp>
-        <p:nvSpPr>
-          <p:cNvPr id="5" name="TextBox 4"/>
-          <p:cNvSpPr txBox="1"/>
-          <p:nvPr/>
-        </p:nvSpPr>
-        <p:spPr>
-          <a:xfrm>
-            <a:off x="5029200" y="1645920"/>
-            <a:ext cx="3657600" cy="2743200"/>
-          </a:xfrm>
-          <a:prstGeom prst="rect">
-            <a:avLst/>
-          </a:prstGeom>
-          <a:noFill/>
-        </p:spPr>
-        <p:txBody>
-          <a:bodyPr wrap="none">
-            <a:spAutoFit/>
-          </a:bodyPr>
-          <a:lstStyle/>
-          <a:p>
-            <a:pPr>
-              <a:defRPr sz="2000" b="1">
-                <a:solidFill>
-                  <a:srgbClr val="1E3A8A"/>
-                </a:solidFill>
-              </a:defRPr>
-            </a:pPr>
-            <a:r>
-              <a:t>🏪 Shop Owner Dashboard</a:t>
-            </a:r>
-          </a:p>
-          <a:p>
-            <a:pPr>
-              <a:spcBef>
-                <a:spcPts val="800"/>
-              </a:spcBef>
-              <a:defRPr sz="1400">
-                <a:solidFill>
-                  <a:srgbClr val="334155"/>
-                </a:solidFill>
-              </a:defRPr>
-            </a:pPr>
-            <a:r>
-              <a:t>• Daily sales overview with stats</a:t>
-            </a:r>
-          </a:p>
-          <a:p>
-            <a:pPr>
-              <a:spcBef>
-                <a:spcPts val="800"/>
-              </a:spcBef>
-              <a:defRPr sz="1400">
-                <a:solidFill>
-                  <a:srgbClr val="334155"/>
-                </a:solidFill>
-              </a:defRPr>
-            </a:pPr>
-            <a:r>
-              <a:t>• Inventory management (245+ items)</a:t>
-            </a:r>
-          </a:p>
-          <a:p>
-            <a:pPr>
-              <a:spcBef>
-                <a:spcPts val="800"/>
-              </a:spcBef>
-              <a:defRPr sz="1400">
-                <a:solidFill>
-                  <a:srgbClr val="334155"/>
-                </a:solidFill>
-              </a:defRPr>
-            </a:pPr>
-            <a:r>
-              <a:t>• Automated billing system</a:t>
-            </a:r>
-          </a:p>
-          <a:p>
-            <a:pPr>
-              <a:spcBef>
-                <a:spcPts val="800"/>
-              </a:spcBef>
-              <a:defRPr sz="1400">
-                <a:solidFill>
-                  <a:srgbClr val="334155"/>
-                </a:solidFill>
-              </a:defRPr>
-            </a:pPr>
-            <a:r>
-              <a:t>• Analytics with visual charts</a:t>
-            </a:r>
-          </a:p>
-        </p:txBody>
-      </p:sp>
-      <p:sp>
-        <p:nvSpPr>
-          <p:cNvPr id="6" name="Rectangle 5"/>
-          <p:cNvSpPr/>
-          <p:nvPr/>
-        </p:nvSpPr>
-        <p:spPr>
-          <a:xfrm>
-            <a:off x="1188720" y="4846320"/>
-            <a:ext cx="1645920" cy="1097280"/>
+            <a:off x="457200" y="1188720"/>
+            <a:ext cx="8229600" cy="45720"/>
           </a:xfrm>
           <a:prstGeom prst="rect">
             <a:avLst/>
           </a:prstGeom>
           <a:solidFill>
-            <a:srgbClr val="3B82F6"/>
+            <a:srgbClr val="16A085"/>
           </a:solidFill>
-          <a:ln/>
+          <a:ln>
+            <a:noFill/>
+          </a:ln>
         </p:spPr>
         <p:style>
           <a:lnRef idx="1">
@@ -6660,214 +4804,7 @@
           <a:bodyPr rtlCol="0" anchor="ctr"/>
           <a:lstStyle/>
           <a:p>
-            <a:pPr algn="ctr">
-              <a:defRPr sz="2400" b="1">
-                <a:solidFill>
-                  <a:srgbClr val="FFFFFF"/>
-                </a:solidFill>
-              </a:defRPr>
-            </a:pPr>
-            <a:r>
-              <a:t>1000+</a:t>
-            </a:r>
-          </a:p>
-          <a:p>
-            <a:pPr algn="ctr">
-              <a:defRPr sz="1200">
-                <a:solidFill>
-                  <a:srgbClr val="FFFFFF"/>
-                </a:solidFill>
-              </a:defRPr>
-            </a:pPr>
-            <a:r>
-              <a:t>Products</a:t>
-            </a:r>
-          </a:p>
-        </p:txBody>
-      </p:sp>
-      <p:sp>
-        <p:nvSpPr>
-          <p:cNvPr id="7" name="Rectangle 6"/>
-          <p:cNvSpPr/>
-          <p:nvPr/>
-        </p:nvSpPr>
-        <p:spPr>
-          <a:xfrm>
-            <a:off x="3017520" y="4846320"/>
-            <a:ext cx="1645920" cy="1097280"/>
-          </a:xfrm>
-          <a:prstGeom prst="rect">
-            <a:avLst/>
-          </a:prstGeom>
-          <a:solidFill>
-            <a:srgbClr val="667EEA"/>
-          </a:solidFill>
-          <a:ln/>
-        </p:spPr>
-        <p:style>
-          <a:lnRef idx="1">
-            <a:schemeClr val="accent1"/>
-          </a:lnRef>
-          <a:fillRef idx="3">
-            <a:schemeClr val="accent1"/>
-          </a:fillRef>
-          <a:effectRef idx="2">
-            <a:schemeClr val="accent1"/>
-          </a:effectRef>
-          <a:fontRef idx="minor">
-            <a:schemeClr val="lt1"/>
-          </a:fontRef>
-        </p:style>
-        <p:txBody>
-          <a:bodyPr rtlCol="0" anchor="ctr"/>
-          <a:lstStyle/>
-          <a:p>
-            <a:pPr algn="ctr">
-              <a:defRPr sz="2400" b="1">
-                <a:solidFill>
-                  <a:srgbClr val="FFFFFF"/>
-                </a:solidFill>
-              </a:defRPr>
-            </a:pPr>
-            <a:r>
-              <a:t>GPS</a:t>
-            </a:r>
-          </a:p>
-          <a:p>
-            <a:pPr algn="ctr">
-              <a:defRPr sz="1200">
-                <a:solidFill>
-                  <a:srgbClr val="FFFFFF"/>
-                </a:solidFill>
-              </a:defRPr>
-            </a:pPr>
-            <a:r>
-              <a:t>Tracking</a:t>
-            </a:r>
-          </a:p>
-        </p:txBody>
-      </p:sp>
-      <p:sp>
-        <p:nvSpPr>
-          <p:cNvPr id="8" name="Rectangle 7"/>
-          <p:cNvSpPr/>
-          <p:nvPr/>
-        </p:nvSpPr>
-        <p:spPr>
-          <a:xfrm>
-            <a:off x="4846320" y="4846320"/>
-            <a:ext cx="1645920" cy="1097280"/>
-          </a:xfrm>
-          <a:prstGeom prst="rect">
-            <a:avLst/>
-          </a:prstGeom>
-          <a:solidFill>
-            <a:srgbClr val="EC4899"/>
-          </a:solidFill>
-          <a:ln/>
-        </p:spPr>
-        <p:style>
-          <a:lnRef idx="1">
-            <a:schemeClr val="accent1"/>
-          </a:lnRef>
-          <a:fillRef idx="3">
-            <a:schemeClr val="accent1"/>
-          </a:fillRef>
-          <a:effectRef idx="2">
-            <a:schemeClr val="accent1"/>
-          </a:effectRef>
-          <a:fontRef idx="minor">
-            <a:schemeClr val="lt1"/>
-          </a:fontRef>
-        </p:style>
-        <p:txBody>
-          <a:bodyPr rtlCol="0" anchor="ctr"/>
-          <a:lstStyle/>
-          <a:p>
-            <a:pPr algn="ctr">
-              <a:defRPr sz="2400" b="1">
-                <a:solidFill>
-                  <a:srgbClr val="FFFFFF"/>
-                </a:solidFill>
-              </a:defRPr>
-            </a:pPr>
-            <a:r>
-              <a:t>Auto</a:t>
-            </a:r>
-          </a:p>
-          <a:p>
-            <a:pPr algn="ctr">
-              <a:defRPr sz="1200">
-                <a:solidFill>
-                  <a:srgbClr val="FFFFFF"/>
-                </a:solidFill>
-              </a:defRPr>
-            </a:pPr>
-            <a:r>
-              <a:t>Billing</a:t>
-            </a:r>
-          </a:p>
-        </p:txBody>
-      </p:sp>
-      <p:sp>
-        <p:nvSpPr>
-          <p:cNvPr id="9" name="Rectangle 8"/>
-          <p:cNvSpPr/>
-          <p:nvPr/>
-        </p:nvSpPr>
-        <p:spPr>
-          <a:xfrm>
-            <a:off x="6675120" y="4846320"/>
-            <a:ext cx="1645920" cy="1097280"/>
-          </a:xfrm>
-          <a:prstGeom prst="rect">
-            <a:avLst/>
-          </a:prstGeom>
-          <a:solidFill>
-            <a:srgbClr val="F59E0B"/>
-          </a:solidFill>
-          <a:ln/>
-        </p:spPr>
-        <p:style>
-          <a:lnRef idx="1">
-            <a:schemeClr val="accent1"/>
-          </a:lnRef>
-          <a:fillRef idx="3">
-            <a:schemeClr val="accent1"/>
-          </a:fillRef>
-          <a:effectRef idx="2">
-            <a:schemeClr val="accent1"/>
-          </a:effectRef>
-          <a:fontRef idx="minor">
-            <a:schemeClr val="lt1"/>
-          </a:fontRef>
-        </p:style>
-        <p:txBody>
-          <a:bodyPr rtlCol="0" anchor="ctr"/>
-          <a:lstStyle/>
-          <a:p>
-            <a:pPr algn="ctr">
-              <a:defRPr sz="2400" b="1">
-                <a:solidFill>
-                  <a:srgbClr val="FFFFFF"/>
-                </a:solidFill>
-              </a:defRPr>
-            </a:pPr>
-            <a:r>
-              <a:t>Charts</a:t>
-            </a:r>
-          </a:p>
-          <a:p>
-            <a:pPr algn="ctr">
-              <a:defRPr sz="1200">
-                <a:solidFill>
-                  <a:srgbClr val="FFFFFF"/>
-                </a:solidFill>
-              </a:defRPr>
-            </a:pPr>
-            <a:r>
-              <a:t>Analytics</a:t>
-            </a:r>
+            <a:pPr algn="ctr"/>
           </a:p>
         </p:txBody>
       </p:sp>
@@ -6899,31 +4836,25 @@
       <p:grpSpPr/>
       <p:sp>
         <p:nvSpPr>
-          <p:cNvPr id="2" name="TextBox 1"/>
-          <p:cNvSpPr txBox="1"/>
-          <p:nvPr/>
-        </p:nvSpPr>
-        <p:spPr>
-          <a:xfrm>
-            <a:off x="457200" y="274320"/>
-            <a:ext cx="8229600" cy="731520"/>
-          </a:xfrm>
-          <a:prstGeom prst="rect">
-            <a:avLst/>
-          </a:prstGeom>
-          <a:noFill/>
-        </p:spPr>
-        <p:txBody>
-          <a:bodyPr wrap="none">
-            <a:spAutoFit/>
-          </a:bodyPr>
-          <a:lstStyle/>
-          <a:p>
-            <a:pPr algn="ctr">
-              <a:defRPr sz="3600" b="1">
-                <a:solidFill>
-                  <a:srgbClr val="1E3A8A"/>
-                </a:solidFill>
+          <p:cNvPr id="2" name="Title 1"/>
+          <p:cNvSpPr>
+            <a:spLocks noGrp="1"/>
+          </p:cNvSpPr>
+          <p:nvPr>
+            <p:ph type="title"/>
+          </p:nvPr>
+        </p:nvSpPr>
+        <p:spPr/>
+        <p:txBody>
+          <a:bodyPr/>
+          <a:lstStyle/>
+          <a:p>
+            <a:pPr algn="l">
+              <a:defRPr sz="3600">
+                <a:solidFill>
+                  <a:srgbClr val="2C3E50"/>
+                </a:solidFill>
+                <a:latin typeface="Calibri"/>
               </a:defRPr>
             </a:pPr>
             <a:r>
@@ -6932,41 +4863,87 @@
           </a:p>
         </p:txBody>
       </p:sp>
-      <p:cxnSp>
-        <p:nvCxnSpPr>
-          <p:cNvPr id="3" name="Connector 2"/>
-          <p:cNvCxnSpPr/>
-          <p:nvPr/>
-        </p:nvCxnSpPr>
-        <p:spPr>
-          <a:xfrm>
-            <a:off x="1828800" y="914400"/>
-            <a:ext cx="5486400" cy="0"/>
-          </a:xfrm>
-          <a:prstGeom prst="line">
-            <a:avLst/>
-          </a:prstGeom>
-          <a:ln w="38100">
-            <a:solidFill>
-              <a:srgbClr val="1E3A8A"/>
-            </a:solidFill>
-          </a:ln>
-        </p:spPr>
-        <p:style>
-          <a:lnRef idx="2">
-            <a:schemeClr val="accent1"/>
-          </a:lnRef>
-          <a:fillRef idx="0">
-            <a:schemeClr val="accent1"/>
-          </a:fillRef>
-          <a:effectRef idx="1">
-            <a:schemeClr val="accent1"/>
-          </a:effectRef>
-          <a:fontRef idx="minor">
-            <a:schemeClr val="tx1"/>
-          </a:fontRef>
-        </p:style>
-      </p:cxnSp>
+      <p:sp>
+        <p:nvSpPr>
+          <p:cNvPr id="3" name="Content Placeholder 2"/>
+          <p:cNvSpPr>
+            <a:spLocks noGrp="1"/>
+          </p:cNvSpPr>
+          <p:nvPr>
+            <p:ph idx="1"/>
+          </p:nvPr>
+        </p:nvSpPr>
+        <p:spPr/>
+        <p:txBody>
+          <a:bodyPr/>
+          <a:lstStyle/>
+          <a:p/>
+          <a:p>
+            <a:pPr>
+              <a:spcAft>
+                <a:spcPts val="1400"/>
+              </a:spcAft>
+              <a:defRPr sz="2000">
+                <a:solidFill>
+                  <a:srgbClr val="323232"/>
+                </a:solidFill>
+                <a:latin typeface="Calibri"/>
+              </a:defRPr>
+            </a:pPr>
+            <a:r>
+              <a:t>Phase 1: Real-time Cloud Synchronization (Multi-device).</a:t>
+            </a:r>
+          </a:p>
+          <a:p>
+            <a:pPr>
+              <a:spcAft>
+                <a:spcPts val="1400"/>
+              </a:spcAft>
+              <a:defRPr sz="2000">
+                <a:solidFill>
+                  <a:srgbClr val="323232"/>
+                </a:solidFill>
+                <a:latin typeface="Calibri"/>
+              </a:defRPr>
+            </a:pPr>
+            <a:r>
+              <a:t>Phase 2: Fintech Integration (UPI/Payment Gateways).</a:t>
+            </a:r>
+          </a:p>
+          <a:p>
+            <a:pPr>
+              <a:spcAft>
+                <a:spcPts val="1400"/>
+              </a:spcAft>
+              <a:defRPr sz="2000">
+                <a:solidFill>
+                  <a:srgbClr val="323232"/>
+                </a:solidFill>
+                <a:latin typeface="Calibri"/>
+              </a:defRPr>
+            </a:pPr>
+            <a:r>
+              <a:t>Phase 3: Hyperlocal Delivery (3rd Party Logistics).</a:t>
+            </a:r>
+          </a:p>
+          <a:p>
+            <a:pPr>
+              <a:spcAft>
+                <a:spcPts val="1400"/>
+              </a:spcAft>
+              <a:defRPr sz="2000">
+                <a:solidFill>
+                  <a:srgbClr val="323232"/>
+                </a:solidFill>
+                <a:latin typeface="Calibri"/>
+              </a:defRPr>
+            </a:pPr>
+            <a:r>
+              <a:t>Phase 4: AI Demand Forecasting &amp; Smart Stocking.</a:t>
+            </a:r>
+          </a:p>
+        </p:txBody>
+      </p:sp>
       <p:sp>
         <p:nvSpPr>
           <p:cNvPr id="4" name="Rectangle 3"/>
@@ -6975,19 +4952,17 @@
         </p:nvSpPr>
         <p:spPr>
           <a:xfrm>
-            <a:off x="640080" y="1828800"/>
-            <a:ext cx="3840480" cy="1828800"/>
+            <a:off x="457200" y="1188720"/>
+            <a:ext cx="8229600" cy="45720"/>
           </a:xfrm>
           <a:prstGeom prst="rect">
             <a:avLst/>
           </a:prstGeom>
           <a:solidFill>
-            <a:srgbClr val="DBEAFE"/>
+            <a:srgbClr val="16A085"/>
           </a:solidFill>
-          <a:ln w="25400">
-            <a:solidFill>
-              <a:srgbClr val="3B82F6"/>
-            </a:solidFill>
+          <a:ln>
+            <a:noFill/>
           </a:ln>
         </p:spPr>
         <p:style>
@@ -7005,273 +4980,10 @@
           </a:fontRef>
         </p:style>
         <p:txBody>
-          <a:bodyPr rtlCol="0" anchor="ctr" wrap="square"/>
-          <a:lstStyle/>
-          <a:p>
-            <a:pPr algn="ctr">
-              <a:defRPr sz="1600" b="1">
-                <a:solidFill>
-                  <a:srgbClr val="1E3A8A"/>
-                </a:solidFill>
-              </a:defRPr>
-            </a:pPr>
-            <a:r>
-              <a:t>☁️ Phase 2: Backend Integration</a:t>
-            </a:r>
-          </a:p>
-          <a:p>
-            <a:pPr>
-              <a:spcBef>
-                <a:spcPts val="800"/>
-              </a:spcBef>
-              <a:defRPr sz="1200">
-                <a:solidFill>
-                  <a:srgbClr val="64748B"/>
-                </a:solidFill>
-              </a:defRPr>
-            </a:pPr>
-            <a:r>
-              <a:t>• Firebase real-time sync</a:t>
-            </a:r>
-            <a:br/>
-            <a:r>
-              <a:t>• OTP authentication</a:t>
-            </a:r>
-            <a:br/>
-            <a:r>
-              <a:t>• Multi-device support</a:t>
-            </a:r>
-          </a:p>
-        </p:txBody>
-      </p:sp>
-      <p:sp>
-        <p:nvSpPr>
-          <p:cNvPr id="5" name="Rectangle 4"/>
-          <p:cNvSpPr/>
-          <p:nvPr/>
-        </p:nvSpPr>
-        <p:spPr>
-          <a:xfrm>
-            <a:off x="4846320" y="1828800"/>
-            <a:ext cx="3840480" cy="1828800"/>
-          </a:xfrm>
-          <a:prstGeom prst="rect">
-            <a:avLst/>
-          </a:prstGeom>
-          <a:solidFill>
-            <a:srgbClr val="DBEAFE"/>
-          </a:solidFill>
-          <a:ln w="25400">
-            <a:solidFill>
-              <a:srgbClr val="3B82F6"/>
-            </a:solidFill>
-          </a:ln>
-        </p:spPr>
-        <p:style>
-          <a:lnRef idx="1">
-            <a:schemeClr val="accent1"/>
-          </a:lnRef>
-          <a:fillRef idx="3">
-            <a:schemeClr val="accent1"/>
-          </a:fillRef>
-          <a:effectRef idx="2">
-            <a:schemeClr val="accent1"/>
-          </a:effectRef>
-          <a:fontRef idx="minor">
-            <a:schemeClr val="lt1"/>
-          </a:fontRef>
-        </p:style>
-        <p:txBody>
-          <a:bodyPr rtlCol="0" anchor="ctr" wrap="square"/>
-          <a:lstStyle/>
-          <a:p>
-            <a:pPr algn="ctr">
-              <a:defRPr sz="1600" b="1">
-                <a:solidFill>
-                  <a:srgbClr val="1E3A8A"/>
-                </a:solidFill>
-              </a:defRPr>
-            </a:pPr>
-            <a:r>
-              <a:t>⭐ Phase 3: Advanced Features</a:t>
-            </a:r>
-          </a:p>
-          <a:p>
-            <a:pPr>
-              <a:spcBef>
-                <a:spcPts val="800"/>
-              </a:spcBef>
-              <a:defRPr sz="1200">
-                <a:solidFill>
-                  <a:srgbClr val="64748B"/>
-                </a:solidFill>
-              </a:defRPr>
-            </a:pPr>
-            <a:r>
-              <a:t>• Payment gateway (Razorpay/Stripe)</a:t>
-            </a:r>
-            <a:br/>
-            <a:r>
-              <a:t>• Order tracking system</a:t>
-            </a:r>
-            <a:br/>
-            <a:r>
-              <a:t>• Push notifications</a:t>
-            </a:r>
-          </a:p>
-        </p:txBody>
-      </p:sp>
-      <p:sp>
-        <p:nvSpPr>
-          <p:cNvPr id="6" name="Rectangle 5"/>
-          <p:cNvSpPr/>
-          <p:nvPr/>
-        </p:nvSpPr>
-        <p:spPr>
-          <a:xfrm>
-            <a:off x="640080" y="4114800"/>
-            <a:ext cx="3840480" cy="1828800"/>
-          </a:xfrm>
-          <a:prstGeom prst="rect">
-            <a:avLst/>
-          </a:prstGeom>
-          <a:solidFill>
-            <a:srgbClr val="DBEAFE"/>
-          </a:solidFill>
-          <a:ln w="25400">
-            <a:solidFill>
-              <a:srgbClr val="3B82F6"/>
-            </a:solidFill>
-          </a:ln>
-        </p:spPr>
-        <p:style>
-          <a:lnRef idx="1">
-            <a:schemeClr val="accent1"/>
-          </a:lnRef>
-          <a:fillRef idx="3">
-            <a:schemeClr val="accent1"/>
-          </a:fillRef>
-          <a:effectRef idx="2">
-            <a:schemeClr val="accent1"/>
-          </a:effectRef>
-          <a:fontRef idx="minor">
-            <a:schemeClr val="lt1"/>
-          </a:fontRef>
-        </p:style>
-        <p:txBody>
-          <a:bodyPr rtlCol="0" anchor="ctr" wrap="square"/>
-          <a:lstStyle/>
-          <a:p>
-            <a:pPr algn="ctr">
-              <a:defRPr sz="1600" b="1">
-                <a:solidFill>
-                  <a:srgbClr val="1E3A8A"/>
-                </a:solidFill>
-              </a:defRPr>
-            </a:pPr>
-            <a:r>
-              <a:t>🤖 Phase 4: AI &amp; ML</a:t>
-            </a:r>
-          </a:p>
-          <a:p>
-            <a:pPr>
-              <a:spcBef>
-                <a:spcPts val="800"/>
-              </a:spcBef>
-              <a:defRPr sz="1200">
-                <a:solidFill>
-                  <a:srgbClr val="64748B"/>
-                </a:solidFill>
-              </a:defRPr>
-            </a:pPr>
-            <a:r>
-              <a:t>• Product recommendations</a:t>
-            </a:r>
-            <a:br/>
-            <a:r>
-              <a:t>• Demand forecasting</a:t>
-            </a:r>
-            <a:br/>
-            <a:r>
-              <a:t>• Dynamic price optimization</a:t>
-            </a:r>
-          </a:p>
-        </p:txBody>
-      </p:sp>
-      <p:sp>
-        <p:nvSpPr>
-          <p:cNvPr id="7" name="Rectangle 6"/>
-          <p:cNvSpPr/>
-          <p:nvPr/>
-        </p:nvSpPr>
-        <p:spPr>
-          <a:xfrm>
-            <a:off x="4846320" y="4114800"/>
-            <a:ext cx="3840480" cy="1828800"/>
-          </a:xfrm>
-          <a:prstGeom prst="rect">
-            <a:avLst/>
-          </a:prstGeom>
-          <a:solidFill>
-            <a:srgbClr val="DBEAFE"/>
-          </a:solidFill>
-          <a:ln w="25400">
-            <a:solidFill>
-              <a:srgbClr val="3B82F6"/>
-            </a:solidFill>
-          </a:ln>
-        </p:spPr>
-        <p:style>
-          <a:lnRef idx="1">
-            <a:schemeClr val="accent1"/>
-          </a:lnRef>
-          <a:fillRef idx="3">
-            <a:schemeClr val="accent1"/>
-          </a:fillRef>
-          <a:effectRef idx="2">
-            <a:schemeClr val="accent1"/>
-          </a:effectRef>
-          <a:fontRef idx="minor">
-            <a:schemeClr val="lt1"/>
-          </a:fontRef>
-        </p:style>
-        <p:txBody>
-          <a:bodyPr rtlCol="0" anchor="ctr" wrap="square"/>
-          <a:lstStyle/>
-          <a:p>
-            <a:pPr algn="ctr">
-              <a:defRPr sz="1600" b="1">
-                <a:solidFill>
-                  <a:srgbClr val="1E3A8A"/>
-                </a:solidFill>
-              </a:defRPr>
-            </a:pPr>
-            <a:r>
-              <a:t>📈 Phase 5: Business Expansion</a:t>
-            </a:r>
-          </a:p>
-          <a:p>
-            <a:pPr>
-              <a:spcBef>
-                <a:spcPts val="800"/>
-              </a:spcBef>
-              <a:defRPr sz="1200">
-                <a:solidFill>
-                  <a:srgbClr val="64748B"/>
-                </a:solidFill>
-              </a:defRPr>
-            </a:pPr>
-            <a:r>
-              <a:t>• Multi-language support</a:t>
-            </a:r>
-            <a:br/>
-            <a:r>
-              <a:t>• Subscription plans</a:t>
-            </a:r>
-            <a:br/>
-            <a:r>
-              <a:t>• Loyalty &amp; rewards program</a:t>
-            </a:r>
+          <a:bodyPr rtlCol="0" anchor="ctr"/>
+          <a:lstStyle/>
+          <a:p>
+            <a:pPr algn="ctr"/>
           </a:p>
         </p:txBody>
       </p:sp>
